--- a/docx/slide/L2_owasp_stride.pptx
+++ b/docx/slide/L2_owasp_stride.pptx
@@ -19,6 +19,7 @@
     <p:sldId id="267" r:id="rId18"/>
     <p:sldId id="268" r:id="rId19"/>
     <p:sldId id="269" r:id="rId20"/>
+    <p:sldId id="270" r:id="rId21"/>
   </p:sldIdLst>
   <p:sldSz cx="12191695" cy="6858000" type="screen4x3"/>
   <p:notesSz cx="6858000" cy="9144000"/>
@@ -3588,6 +3589,266 @@
 </file>
 
 <file path=ppt/slides/slide10.xml><?xml version="1.0" encoding="utf-8"?>
+<p:sld xmlns:a="http://schemas.openxmlformats.org/drawingml/2006/main" xmlns:p="http://schemas.openxmlformats.org/presentationml/2006/main" xmlns:r="http://schemas.openxmlformats.org/officeDocument/2006/relationships">
+  <p:cSld>
+    <p:spTree>
+      <p:nvGrpSpPr>
+        <p:cNvPr id="1" name=""/>
+        <p:cNvGrpSpPr/>
+        <p:nvPr/>
+      </p:nvGrpSpPr>
+      <p:grpSpPr/>
+      <p:sp>
+        <p:nvSpPr>
+          <p:cNvPr id="2" name="Rectangle 1"/>
+          <p:cNvSpPr/>
+          <p:nvPr/>
+        </p:nvSpPr>
+        <p:spPr>
+          <a:xfrm>
+            <a:off x="0" y="0"/>
+            <a:ext cx="12191695" cy="777240"/>
+          </a:xfrm>
+          <a:prstGeom prst="rect">
+            <a:avLst/>
+          </a:prstGeom>
+          <a:solidFill>
+            <a:srgbClr val="0F2D52"/>
+          </a:solidFill>
+          <a:ln>
+            <a:noFill/>
+          </a:ln>
+        </p:spPr>
+        <p:style>
+          <a:lnRef idx="1">
+            <a:schemeClr val="accent1"/>
+          </a:lnRef>
+          <a:fillRef idx="3">
+            <a:schemeClr val="accent1"/>
+          </a:fillRef>
+          <a:effectRef idx="2">
+            <a:schemeClr val="accent1"/>
+          </a:effectRef>
+          <a:fontRef idx="minor">
+            <a:schemeClr val="lt1"/>
+          </a:fontRef>
+        </p:style>
+        <p:txBody>
+          <a:bodyPr rtlCol="0" anchor="ctr"/>
+          <a:lstStyle/>
+          <a:p>
+            <a:pPr algn="ctr"/>
+          </a:p>
+        </p:txBody>
+      </p:sp>
+      <p:sp>
+        <p:nvSpPr>
+          <p:cNvPr id="3" name="TextBox 2"/>
+          <p:cNvSpPr txBox="1"/>
+          <p:nvPr/>
+        </p:nvSpPr>
+        <p:spPr>
+          <a:xfrm>
+            <a:off x="457200" y="164592"/>
+            <a:ext cx="10972800" cy="502920"/>
+          </a:xfrm>
+          <a:prstGeom prst="rect">
+            <a:avLst/>
+          </a:prstGeom>
+          <a:noFill/>
+        </p:spPr>
+        <p:txBody>
+          <a:bodyPr wrap="square" lIns="45720" rIns="45720" tIns="18288" bIns="18288" anchor="ctr">
+            <a:spAutoFit/>
+          </a:bodyPr>
+          <a:lstStyle/>
+          <a:p>
+            <a:pPr algn="l"/>
+            <a:r>
+              <a:rPr sz="2400" b="1" i="0">
+                <a:solidFill>
+                  <a:srgbClr val="FFFFFF"/>
+                </a:solidFill>
+                <a:latin typeface="Calibri"/>
+              </a:rPr>
+              <a:t>DFD: esempio su mini-blog</a:t>
+            </a:r>
+          </a:p>
+        </p:txBody>
+      </p:sp>
+      <p:pic>
+        <p:nvPicPr>
+          <p:cNvPr id="4" name="Picture 3" descr="cap2_dfd_mini_blog.png"/>
+          <p:cNvPicPr>
+            <a:picLocks noChangeAspect="1"/>
+          </p:cNvPicPr>
+          <p:nvPr/>
+        </p:nvPicPr>
+        <p:blipFill>
+          <a:blip r:embed="rId2"/>
+          <a:stretch>
+            <a:fillRect/>
+          </a:stretch>
+        </p:blipFill>
+        <p:spPr>
+          <a:xfrm>
+            <a:off x="640080" y="1097280"/>
+            <a:ext cx="10881360" cy="4572000"/>
+          </a:xfrm>
+          <a:prstGeom prst="rect">
+            <a:avLst/>
+          </a:prstGeom>
+        </p:spPr>
+      </p:pic>
+      <p:sp>
+        <p:nvSpPr>
+          <p:cNvPr id="5" name="TextBox 4"/>
+          <p:cNvSpPr txBox="1"/>
+          <p:nvPr/>
+        </p:nvSpPr>
+        <p:spPr>
+          <a:xfrm>
+            <a:off x="457200" y="5852160"/>
+            <a:ext cx="11247120" cy="365760"/>
+          </a:xfrm>
+          <a:prstGeom prst="rect">
+            <a:avLst/>
+          </a:prstGeom>
+          <a:noFill/>
+        </p:spPr>
+        <p:txBody>
+          <a:bodyPr wrap="square" lIns="45720" rIns="45720" tIns="18288" bIns="18288" anchor="t">
+            <a:spAutoFit/>
+          </a:bodyPr>
+          <a:lstStyle/>
+          <a:p>
+            <a:pPr algn="ctr"/>
+            <a:r>
+              <a:rPr sz="1300" b="0" i="1">
+                <a:solidFill>
+                  <a:srgbClr val="6B7280"/>
+                </a:solidFill>
+                <a:latin typeface="Calibri"/>
+              </a:rPr>
+              <a:t>Data Flow Diagram con trust boundary tra Internet/server e server/DB</a:t>
+            </a:r>
+          </a:p>
+        </p:txBody>
+      </p:sp>
+      <p:cxnSp>
+        <p:nvCxnSpPr>
+          <p:cNvPr id="6" name="Connector 5"/>
+          <p:cNvCxnSpPr/>
+          <p:nvPr/>
+        </p:nvCxnSpPr>
+        <p:spPr>
+          <a:xfrm>
+            <a:off x="457200" y="6446520"/>
+            <a:ext cx="11274552" cy="0"/>
+          </a:xfrm>
+          <a:prstGeom prst="line">
+            <a:avLst/>
+          </a:prstGeom>
+          <a:ln w="19050">
+            <a:solidFill>
+              <a:srgbClr val="00A0B0"/>
+            </a:solidFill>
+          </a:ln>
+        </p:spPr>
+        <p:style>
+          <a:lnRef idx="2">
+            <a:schemeClr val="accent1"/>
+          </a:lnRef>
+          <a:fillRef idx="0">
+            <a:schemeClr val="accent1"/>
+          </a:fillRef>
+          <a:effectRef idx="1">
+            <a:schemeClr val="accent1"/>
+          </a:effectRef>
+          <a:fontRef idx="minor">
+            <a:schemeClr val="tx1"/>
+          </a:fontRef>
+        </p:style>
+      </p:cxnSp>
+      <p:sp>
+        <p:nvSpPr>
+          <p:cNvPr id="7" name="TextBox 6"/>
+          <p:cNvSpPr txBox="1"/>
+          <p:nvPr/>
+        </p:nvSpPr>
+        <p:spPr>
+          <a:xfrm>
+            <a:off x="457200" y="6473952"/>
+            <a:ext cx="7315200" cy="292608"/>
+          </a:xfrm>
+          <a:prstGeom prst="rect">
+            <a:avLst/>
+          </a:prstGeom>
+          <a:noFill/>
+        </p:spPr>
+        <p:txBody>
+          <a:bodyPr wrap="square" lIns="45720" rIns="45720" tIns="18288" bIns="18288" anchor="t">
+            <a:spAutoFit/>
+          </a:bodyPr>
+          <a:lstStyle/>
+          <a:p>
+            <a:pPr algn="l"/>
+            <a:r>
+              <a:rPr sz="1000" b="0" i="0">
+                <a:solidFill>
+                  <a:srgbClr val="6B7280"/>
+                </a:solidFill>
+                <a:latin typeface="Calibri"/>
+              </a:rPr>
+              <a:t>Secure Coding · Corso IFTS STEM · A. Manneschi · 2024/2025</a:t>
+            </a:r>
+          </a:p>
+        </p:txBody>
+      </p:sp>
+      <p:sp>
+        <p:nvSpPr>
+          <p:cNvPr id="8" name="TextBox 7"/>
+          <p:cNvSpPr txBox="1"/>
+          <p:nvPr/>
+        </p:nvSpPr>
+        <p:spPr>
+          <a:xfrm>
+            <a:off x="10515600" y="6473952"/>
+            <a:ext cx="1188720" cy="292608"/>
+          </a:xfrm>
+          <a:prstGeom prst="rect">
+            <a:avLst/>
+          </a:prstGeom>
+          <a:noFill/>
+        </p:spPr>
+        <p:txBody>
+          <a:bodyPr wrap="square" lIns="45720" rIns="45720" tIns="18288" bIns="18288" anchor="t">
+            <a:spAutoFit/>
+          </a:bodyPr>
+          <a:lstStyle/>
+          <a:p>
+            <a:pPr algn="r"/>
+            <a:r>
+              <a:rPr sz="1000" b="1" i="0">
+                <a:solidFill>
+                  <a:srgbClr val="6B7280"/>
+                </a:solidFill>
+                <a:latin typeface="Calibri"/>
+              </a:rPr>
+              <a:t>L2  ·  10/15</a:t>
+            </a:r>
+          </a:p>
+        </p:txBody>
+      </p:sp>
+    </p:spTree>
+  </p:cSld>
+  <p:clrMapOvr>
+    <a:masterClrMapping/>
+  </p:clrMapOvr>
+</p:sld>
+</file>
+
+<file path=ppt/slides/slide11.xml><?xml version="1.0" encoding="utf-8"?>
 <p:sld xmlns:a="http://schemas.openxmlformats.org/drawingml/2006/main" xmlns:p="http://schemas.openxmlformats.org/presentationml/2006/main" xmlns:r="http://schemas.openxmlformats.org/officeDocument/2006/relationships">
   <p:cSld>
     <p:spTree>
@@ -4527,427 +4788,7 @@
                 </a:solidFill>
                 <a:latin typeface="Calibri"/>
               </a:rPr>
-              <a:t>L2  ·  10/14</a:t>
-            </a:r>
-          </a:p>
-        </p:txBody>
-      </p:sp>
-    </p:spTree>
-  </p:cSld>
-  <p:clrMapOvr>
-    <a:masterClrMapping/>
-  </p:clrMapOvr>
-</p:sld>
-</file>
-
-<file path=ppt/slides/slide11.xml><?xml version="1.0" encoding="utf-8"?>
-<p:sld xmlns:a="http://schemas.openxmlformats.org/drawingml/2006/main" xmlns:p="http://schemas.openxmlformats.org/presentationml/2006/main" xmlns:r="http://schemas.openxmlformats.org/officeDocument/2006/relationships">
-  <p:cSld>
-    <p:spTree>
-      <p:nvGrpSpPr>
-        <p:cNvPr id="1" name=""/>
-        <p:cNvGrpSpPr/>
-        <p:nvPr/>
-      </p:nvGrpSpPr>
-      <p:grpSpPr/>
-      <p:sp>
-        <p:nvSpPr>
-          <p:cNvPr id="2" name="Rectangle 1"/>
-          <p:cNvSpPr/>
-          <p:nvPr/>
-        </p:nvSpPr>
-        <p:spPr>
-          <a:xfrm>
-            <a:off x="0" y="0"/>
-            <a:ext cx="12191695" cy="777240"/>
-          </a:xfrm>
-          <a:prstGeom prst="rect">
-            <a:avLst/>
-          </a:prstGeom>
-          <a:solidFill>
-            <a:srgbClr val="0F2D52"/>
-          </a:solidFill>
-          <a:ln>
-            <a:noFill/>
-          </a:ln>
-        </p:spPr>
-        <p:style>
-          <a:lnRef idx="1">
-            <a:schemeClr val="accent1"/>
-          </a:lnRef>
-          <a:fillRef idx="3">
-            <a:schemeClr val="accent1"/>
-          </a:fillRef>
-          <a:effectRef idx="2">
-            <a:schemeClr val="accent1"/>
-          </a:effectRef>
-          <a:fontRef idx="minor">
-            <a:schemeClr val="lt1"/>
-          </a:fontRef>
-        </p:style>
-        <p:txBody>
-          <a:bodyPr rtlCol="0" anchor="ctr"/>
-          <a:lstStyle/>
-          <a:p>
-            <a:pPr algn="ctr"/>
-          </a:p>
-        </p:txBody>
-      </p:sp>
-      <p:sp>
-        <p:nvSpPr>
-          <p:cNvPr id="3" name="TextBox 2"/>
-          <p:cNvSpPr txBox="1"/>
-          <p:nvPr/>
-        </p:nvSpPr>
-        <p:spPr>
-          <a:xfrm>
-            <a:off x="457200" y="164592"/>
-            <a:ext cx="10972800" cy="502920"/>
-          </a:xfrm>
-          <a:prstGeom prst="rect">
-            <a:avLst/>
-          </a:prstGeom>
-          <a:noFill/>
-        </p:spPr>
-        <p:txBody>
-          <a:bodyPr wrap="square" lIns="45720" rIns="45720" tIns="18288" bIns="18288" anchor="ctr">
-            <a:spAutoFit/>
-          </a:bodyPr>
-          <a:lstStyle/>
-          <a:p>
-            <a:pPr algn="l"/>
-            <a:r>
-              <a:rPr sz="2400" b="1" i="0">
-                <a:solidFill>
-                  <a:srgbClr val="FFFFFF"/>
-                </a:solidFill>
-                <a:latin typeface="Calibri"/>
-              </a:rPr>
-              <a:t>✏  Workshop in aula (30 min)</a:t>
-            </a:r>
-          </a:p>
-        </p:txBody>
-      </p:sp>
-      <p:sp>
-        <p:nvSpPr>
-          <p:cNvPr id="4" name="TextBox 3"/>
-          <p:cNvSpPr txBox="1"/>
-          <p:nvPr/>
-        </p:nvSpPr>
-        <p:spPr>
-          <a:xfrm>
-            <a:off x="640080" y="1097280"/>
-            <a:ext cx="10972800" cy="5029200"/>
-          </a:xfrm>
-          <a:prstGeom prst="rect">
-            <a:avLst/>
-          </a:prstGeom>
-          <a:noFill/>
-        </p:spPr>
-        <p:txBody>
-          <a:bodyPr wrap="square">
-            <a:spAutoFit/>
-          </a:bodyPr>
-          <a:lstStyle/>
-          <a:p>
-            <a:pPr>
-              <a:lnSpc>
-                <a:spcPct val="150000"/>
-              </a:lnSpc>
-              <a:spcAft>
-                <a:spcPts val="400"/>
-              </a:spcAft>
-            </a:pPr>
-            <a:r>
-              <a:rPr sz="2000" b="1">
-                <a:solidFill>
-                  <a:srgbClr val="00A0B0"/>
-                </a:solidFill>
-                <a:latin typeface="Calibri"/>
-              </a:rPr>
-              <a:t>▸  </a:t>
-            </a:r>
-            <a:r>
-              <a:rPr sz="2000">
-                <a:solidFill>
-                  <a:srgbClr val="1A1A2E"/>
-                </a:solidFill>
-                <a:latin typeface="Calibri"/>
-              </a:rPr>
-              <a:t>A coppie: applica STRIDE a un e-commerce piccolo</a:t>
-            </a:r>
-          </a:p>
-          <a:p>
-            <a:pPr>
-              <a:lnSpc>
-                <a:spcPct val="150000"/>
-              </a:lnSpc>
-              <a:spcAft>
-                <a:spcPts val="400"/>
-              </a:spcAft>
-            </a:pPr>
-            <a:r>
-              <a:rPr sz="2000" b="1">
-                <a:solidFill>
-                  <a:srgbClr val="00A0B0"/>
-                </a:solidFill>
-                <a:latin typeface="Calibri"/>
-              </a:rPr>
-              <a:t>▸  </a:t>
-            </a:r>
-            <a:r>
-              <a:rPr sz="2000">
-                <a:solidFill>
-                  <a:srgbClr val="1A1A2E"/>
-                </a:solidFill>
-                <a:latin typeface="Calibri"/>
-              </a:rPr>
-              <a:t>registrazione · login · ricerca · ordine · pagamento Stripe · email</a:t>
-            </a:r>
-          </a:p>
-          <a:p>
-            <a:pPr>
-              <a:lnSpc>
-                <a:spcPct val="150000"/>
-              </a:lnSpc>
-              <a:spcAft>
-                <a:spcPts val="400"/>
-              </a:spcAft>
-            </a:pPr>
-            <a:r>
-              <a:rPr sz="2000" b="1">
-                <a:solidFill>
-                  <a:srgbClr val="00A0B0"/>
-                </a:solidFill>
-                <a:latin typeface="Calibri"/>
-              </a:rPr>
-              <a:t>▸  </a:t>
-            </a:r>
-            <a:r>
-              <a:rPr sz="2000">
-                <a:solidFill>
-                  <a:srgbClr val="1A1A2E"/>
-                </a:solidFill>
-                <a:latin typeface="Calibri"/>
-              </a:rPr>
-              <a:t/>
-            </a:r>
-          </a:p>
-          <a:p>
-            <a:pPr>
-              <a:lnSpc>
-                <a:spcPct val="150000"/>
-              </a:lnSpc>
-              <a:spcAft>
-                <a:spcPts val="400"/>
-              </a:spcAft>
-            </a:pPr>
-            <a:r>
-              <a:rPr sz="2000" b="1">
-                <a:solidFill>
-                  <a:srgbClr val="00A0B0"/>
-                </a:solidFill>
-                <a:latin typeface="Calibri"/>
-              </a:rPr>
-              <a:t>▸  </a:t>
-            </a:r>
-            <a:r>
-              <a:rPr sz="2000">
-                <a:solidFill>
-                  <a:srgbClr val="1A1A2E"/>
-                </a:solidFill>
-                <a:latin typeface="Calibri"/>
-              </a:rPr>
-              <a:t>Output richiesto:</a:t>
-            </a:r>
-          </a:p>
-          <a:p>
-            <a:pPr>
-              <a:lnSpc>
-                <a:spcPct val="150000"/>
-              </a:lnSpc>
-              <a:spcAft>
-                <a:spcPts val="400"/>
-              </a:spcAft>
-            </a:pPr>
-            <a:r>
-              <a:rPr sz="2000" b="1">
-                <a:solidFill>
-                  <a:srgbClr val="00A0B0"/>
-                </a:solidFill>
-                <a:latin typeface="Calibri"/>
-              </a:rPr>
-              <a:t>▸  </a:t>
-            </a:r>
-            <a:r>
-              <a:rPr sz="2000">
-                <a:solidFill>
-                  <a:srgbClr val="1A1A2E"/>
-                </a:solidFill>
-                <a:latin typeface="Calibri"/>
-              </a:rPr>
-              <a:t>Disegno DFD (≥4 processi, 2 datastore, 2 trust boundary)</a:t>
-            </a:r>
-          </a:p>
-          <a:p>
-            <a:pPr>
-              <a:lnSpc>
-                <a:spcPct val="150000"/>
-              </a:lnSpc>
-              <a:spcAft>
-                <a:spcPts val="400"/>
-              </a:spcAft>
-            </a:pPr>
-            <a:r>
-              <a:rPr sz="2000" b="1">
-                <a:solidFill>
-                  <a:srgbClr val="00A0B0"/>
-                </a:solidFill>
-                <a:latin typeface="Calibri"/>
-              </a:rPr>
-              <a:t>▸  </a:t>
-            </a:r>
-            <a:r>
-              <a:rPr sz="2000">
-                <a:solidFill>
-                  <a:srgbClr val="1A1A2E"/>
-                </a:solidFill>
-                <a:latin typeface="Calibri"/>
-              </a:rPr>
-              <a:t>Tabella STRIDE con ≥8 minacce sparse tra le 6 categorie</a:t>
-            </a:r>
-          </a:p>
-          <a:p>
-            <a:pPr>
-              <a:lnSpc>
-                <a:spcPct val="150000"/>
-              </a:lnSpc>
-              <a:spcAft>
-                <a:spcPts val="400"/>
-              </a:spcAft>
-            </a:pPr>
-            <a:r>
-              <a:rPr sz="2000" b="1">
-                <a:solidFill>
-                  <a:srgbClr val="00A0B0"/>
-                </a:solidFill>
-                <a:latin typeface="Calibri"/>
-              </a:rPr>
-              <a:t>▸  </a:t>
-            </a:r>
-            <a:r>
-              <a:rPr sz="2000">
-                <a:solidFill>
-                  <a:srgbClr val="1A1A2E"/>
-                </a:solidFill>
-                <a:latin typeface="Calibri"/>
-              </a:rPr>
-              <a:t>Una mitigazione per ogni minaccia</a:t>
-            </a:r>
-          </a:p>
-        </p:txBody>
-      </p:sp>
-      <p:cxnSp>
-        <p:nvCxnSpPr>
-          <p:cNvPr id="5" name="Connector 4"/>
-          <p:cNvCxnSpPr/>
-          <p:nvPr/>
-        </p:nvCxnSpPr>
-        <p:spPr>
-          <a:xfrm>
-            <a:off x="457200" y="6446520"/>
-            <a:ext cx="11274552" cy="0"/>
-          </a:xfrm>
-          <a:prstGeom prst="line">
-            <a:avLst/>
-          </a:prstGeom>
-          <a:ln w="19050">
-            <a:solidFill>
-              <a:srgbClr val="00A0B0"/>
-            </a:solidFill>
-          </a:ln>
-        </p:spPr>
-        <p:style>
-          <a:lnRef idx="2">
-            <a:schemeClr val="accent1"/>
-          </a:lnRef>
-          <a:fillRef idx="0">
-            <a:schemeClr val="accent1"/>
-          </a:fillRef>
-          <a:effectRef idx="1">
-            <a:schemeClr val="accent1"/>
-          </a:effectRef>
-          <a:fontRef idx="minor">
-            <a:schemeClr val="tx1"/>
-          </a:fontRef>
-        </p:style>
-      </p:cxnSp>
-      <p:sp>
-        <p:nvSpPr>
-          <p:cNvPr id="6" name="TextBox 5"/>
-          <p:cNvSpPr txBox="1"/>
-          <p:nvPr/>
-        </p:nvSpPr>
-        <p:spPr>
-          <a:xfrm>
-            <a:off x="457200" y="6473952"/>
-            <a:ext cx="7315200" cy="292608"/>
-          </a:xfrm>
-          <a:prstGeom prst="rect">
-            <a:avLst/>
-          </a:prstGeom>
-          <a:noFill/>
-        </p:spPr>
-        <p:txBody>
-          <a:bodyPr wrap="square" lIns="45720" rIns="45720" tIns="18288" bIns="18288" anchor="t">
-            <a:spAutoFit/>
-          </a:bodyPr>
-          <a:lstStyle/>
-          <a:p>
-            <a:pPr algn="l"/>
-            <a:r>
-              <a:rPr sz="1000" b="0" i="0">
-                <a:solidFill>
-                  <a:srgbClr val="6B7280"/>
-                </a:solidFill>
-                <a:latin typeface="Calibri"/>
-              </a:rPr>
-              <a:t>Secure Coding · Corso IFTS STEM · A. Manneschi · 2024/2025</a:t>
-            </a:r>
-          </a:p>
-        </p:txBody>
-      </p:sp>
-      <p:sp>
-        <p:nvSpPr>
-          <p:cNvPr id="7" name="TextBox 6"/>
-          <p:cNvSpPr txBox="1"/>
-          <p:nvPr/>
-        </p:nvSpPr>
-        <p:spPr>
-          <a:xfrm>
-            <a:off x="10515600" y="6473952"/>
-            <a:ext cx="1188720" cy="292608"/>
-          </a:xfrm>
-          <a:prstGeom prst="rect">
-            <a:avLst/>
-          </a:prstGeom>
-          <a:noFill/>
-        </p:spPr>
-        <p:txBody>
-          <a:bodyPr wrap="square" lIns="45720" rIns="45720" tIns="18288" bIns="18288" anchor="t">
-            <a:spAutoFit/>
-          </a:bodyPr>
-          <a:lstStyle/>
-          <a:p>
-            <a:pPr algn="r"/>
-            <a:r>
-              <a:rPr sz="1000" b="1" i="0">
-                <a:solidFill>
-                  <a:srgbClr val="6B7280"/>
-                </a:solidFill>
-                <a:latin typeface="Calibri"/>
-              </a:rPr>
-              <a:t>L2  ·  11/14</a:t>
+              <a:t>L2  ·  11/15</a:t>
             </a:r>
           </a:p>
         </p:txBody>
@@ -5043,64 +4884,21 @@
                 </a:solidFill>
                 <a:latin typeface="Calibri"/>
               </a:rPr>
-              <a:t>📌  Cosa portare a casa</a:t>
-            </a:r>
-          </a:p>
-        </p:txBody>
-      </p:sp>
-      <p:sp>
-        <p:nvSpPr>
-          <p:cNvPr id="4" name="Oval 3"/>
-          <p:cNvSpPr/>
-          <p:nvPr/>
-        </p:nvSpPr>
-        <p:spPr>
-          <a:xfrm>
-            <a:off x="914400" y="1440180"/>
-            <a:ext cx="777240" cy="777240"/>
-          </a:xfrm>
-          <a:prstGeom prst="ellipse">
-            <a:avLst/>
-          </a:prstGeom>
-          <a:solidFill>
-            <a:srgbClr val="00A0B0"/>
-          </a:solidFill>
-          <a:ln>
-            <a:noFill/>
-          </a:ln>
-        </p:spPr>
-        <p:style>
-          <a:lnRef idx="1">
-            <a:schemeClr val="accent1"/>
-          </a:lnRef>
-          <a:fillRef idx="3">
-            <a:schemeClr val="accent1"/>
-          </a:fillRef>
-          <a:effectRef idx="2">
-            <a:schemeClr val="accent1"/>
-          </a:effectRef>
-          <a:fontRef idx="minor">
-            <a:schemeClr val="lt1"/>
-          </a:fontRef>
-        </p:style>
-        <p:txBody>
-          <a:bodyPr rtlCol="0" anchor="ctr"/>
-          <a:lstStyle/>
-          <a:p>
-            <a:pPr algn="ctr"/>
-          </a:p>
-        </p:txBody>
-      </p:sp>
-      <p:sp>
-        <p:nvSpPr>
-          <p:cNvPr id="5" name="TextBox 4"/>
+              <a:t>✏  Workshop in aula (30 min)</a:t>
+            </a:r>
+          </a:p>
+        </p:txBody>
+      </p:sp>
+      <p:sp>
+        <p:nvSpPr>
+          <p:cNvPr id="4" name="TextBox 3"/>
           <p:cNvSpPr txBox="1"/>
           <p:nvPr/>
         </p:nvSpPr>
         <p:spPr>
           <a:xfrm>
-            <a:off x="914400" y="1440180"/>
-            <a:ext cx="777240" cy="777240"/>
+            <a:off x="640080" y="1097280"/>
+            <a:ext cx="10972800" cy="5029200"/>
           </a:xfrm>
           <a:prstGeom prst="rect">
             <a:avLst/>
@@ -5108,749 +4906,211 @@
           <a:noFill/>
         </p:spPr>
         <p:txBody>
-          <a:bodyPr wrap="square" lIns="45720" rIns="45720" tIns="18288" bIns="18288" anchor="ctr">
+          <a:bodyPr wrap="square">
             <a:spAutoFit/>
           </a:bodyPr>
           <a:lstStyle/>
           <a:p>
-            <a:pPr algn="ctr"/>
-            <a:r>
-              <a:rPr sz="2800" b="1" i="0">
-                <a:solidFill>
-                  <a:srgbClr val="FFFFFF"/>
+            <a:pPr>
+              <a:lnSpc>
+                <a:spcPct val="150000"/>
+              </a:lnSpc>
+              <a:spcAft>
+                <a:spcPts val="400"/>
+              </a:spcAft>
+            </a:pPr>
+            <a:r>
+              <a:rPr sz="2000" b="1">
+                <a:solidFill>
+                  <a:srgbClr val="00A0B0"/>
                 </a:solidFill>
                 <a:latin typeface="Calibri"/>
               </a:rPr>
-              <a:t>1</a:t>
-            </a:r>
-          </a:p>
-        </p:txBody>
-      </p:sp>
-      <p:sp>
-        <p:nvSpPr>
-          <p:cNvPr id="6" name="Rounded Rectangle 5"/>
-          <p:cNvSpPr/>
-          <p:nvPr/>
-        </p:nvSpPr>
-        <p:spPr>
-          <a:xfrm>
-            <a:off x="2011680" y="1440180"/>
-            <a:ext cx="9144000" cy="777240"/>
-          </a:xfrm>
-          <a:prstGeom prst="roundRect">
-            <a:avLst>
-              <a:gd name="adj" fmla="val 8000"/>
-            </a:avLst>
-          </a:prstGeom>
-          <a:solidFill>
-            <a:srgbClr val="FBFBFD"/>
-          </a:solidFill>
-          <a:ln w="19050">
-            <a:solidFill>
-              <a:srgbClr val="00A0B0"/>
-            </a:solidFill>
-          </a:ln>
-        </p:spPr>
-        <p:style>
-          <a:lnRef idx="1">
-            <a:schemeClr val="accent1"/>
-          </a:lnRef>
-          <a:fillRef idx="3">
-            <a:schemeClr val="accent1"/>
-          </a:fillRef>
-          <a:effectRef idx="2">
-            <a:schemeClr val="accent1"/>
-          </a:effectRef>
-          <a:fontRef idx="minor">
-            <a:schemeClr val="lt1"/>
-          </a:fontRef>
-        </p:style>
-        <p:txBody>
-          <a:bodyPr rtlCol="0" anchor="ctr"/>
-          <a:lstStyle/>
-          <a:p>
-            <a:pPr algn="ctr"/>
-          </a:p>
-        </p:txBody>
-      </p:sp>
-      <p:sp>
-        <p:nvSpPr>
-          <p:cNvPr id="7" name="TextBox 6"/>
-          <p:cNvSpPr txBox="1"/>
-          <p:nvPr/>
-        </p:nvSpPr>
-        <p:spPr>
-          <a:xfrm>
-            <a:off x="2286000" y="1440180"/>
-            <a:ext cx="8686800" cy="777240"/>
-          </a:xfrm>
-          <a:prstGeom prst="rect">
-            <a:avLst/>
-          </a:prstGeom>
-          <a:noFill/>
-        </p:spPr>
-        <p:txBody>
-          <a:bodyPr wrap="square" lIns="45720" rIns="45720" tIns="18288" bIns="18288" anchor="ctr">
-            <a:spAutoFit/>
-          </a:bodyPr>
-          <a:lstStyle/>
-          <a:p>
-            <a:pPr algn="l"/>
-            <a:r>
-              <a:rPr sz="1800" b="0" i="0">
+              <a:t>▸  </a:t>
+            </a:r>
+            <a:r>
+              <a:rPr sz="2000">
                 <a:solidFill>
                   <a:srgbClr val="1A1A2E"/>
                 </a:solidFill>
                 <a:latin typeface="Calibri"/>
               </a:rPr>
-              <a:t>OWASP Top 10: impara almeno i primi 5 a memoria</a:t>
-            </a:r>
-          </a:p>
-        </p:txBody>
-      </p:sp>
-      <p:sp>
-        <p:nvSpPr>
-          <p:cNvPr id="8" name="Oval 7"/>
-          <p:cNvSpPr/>
-          <p:nvPr/>
-        </p:nvSpPr>
-        <p:spPr>
-          <a:xfrm>
-            <a:off x="914400" y="2354580"/>
-            <a:ext cx="777240" cy="777240"/>
-          </a:xfrm>
-          <a:prstGeom prst="ellipse">
-            <a:avLst/>
-          </a:prstGeom>
-          <a:solidFill>
-            <a:srgbClr val="00A0B0"/>
-          </a:solidFill>
-          <a:ln>
-            <a:noFill/>
-          </a:ln>
-        </p:spPr>
-        <p:style>
-          <a:lnRef idx="1">
-            <a:schemeClr val="accent1"/>
-          </a:lnRef>
-          <a:fillRef idx="3">
-            <a:schemeClr val="accent1"/>
-          </a:fillRef>
-          <a:effectRef idx="2">
-            <a:schemeClr val="accent1"/>
-          </a:effectRef>
-          <a:fontRef idx="minor">
-            <a:schemeClr val="lt1"/>
-          </a:fontRef>
-        </p:style>
-        <p:txBody>
-          <a:bodyPr rtlCol="0" anchor="ctr"/>
-          <a:lstStyle/>
-          <a:p>
-            <a:pPr algn="ctr"/>
-          </a:p>
-        </p:txBody>
-      </p:sp>
-      <p:sp>
-        <p:nvSpPr>
-          <p:cNvPr id="9" name="TextBox 8"/>
-          <p:cNvSpPr txBox="1"/>
-          <p:nvPr/>
-        </p:nvSpPr>
-        <p:spPr>
-          <a:xfrm>
-            <a:off x="914400" y="2354580"/>
-            <a:ext cx="777240" cy="777240"/>
-          </a:xfrm>
-          <a:prstGeom prst="rect">
-            <a:avLst/>
-          </a:prstGeom>
-          <a:noFill/>
-        </p:spPr>
-        <p:txBody>
-          <a:bodyPr wrap="square" lIns="45720" rIns="45720" tIns="18288" bIns="18288" anchor="ctr">
-            <a:spAutoFit/>
-          </a:bodyPr>
-          <a:lstStyle/>
-          <a:p>
-            <a:pPr algn="ctr"/>
-            <a:r>
-              <a:rPr sz="2800" b="1" i="0">
-                <a:solidFill>
-                  <a:srgbClr val="FFFFFF"/>
+              <a:t>A coppie: applica STRIDE a un e-commerce piccolo</a:t>
+            </a:r>
+          </a:p>
+          <a:p>
+            <a:pPr>
+              <a:lnSpc>
+                <a:spcPct val="150000"/>
+              </a:lnSpc>
+              <a:spcAft>
+                <a:spcPts val="400"/>
+              </a:spcAft>
+            </a:pPr>
+            <a:r>
+              <a:rPr sz="2000" b="1">
+                <a:solidFill>
+                  <a:srgbClr val="00A0B0"/>
                 </a:solidFill>
                 <a:latin typeface="Calibri"/>
               </a:rPr>
-              <a:t>2</a:t>
-            </a:r>
-          </a:p>
-        </p:txBody>
-      </p:sp>
-      <p:sp>
-        <p:nvSpPr>
-          <p:cNvPr id="10" name="Rounded Rectangle 9"/>
-          <p:cNvSpPr/>
-          <p:nvPr/>
-        </p:nvSpPr>
-        <p:spPr>
-          <a:xfrm>
-            <a:off x="2011680" y="2354580"/>
-            <a:ext cx="9144000" cy="777240"/>
-          </a:xfrm>
-          <a:prstGeom prst="roundRect">
-            <a:avLst>
-              <a:gd name="adj" fmla="val 8000"/>
-            </a:avLst>
-          </a:prstGeom>
-          <a:solidFill>
-            <a:srgbClr val="FBFBFD"/>
-          </a:solidFill>
-          <a:ln w="19050">
-            <a:solidFill>
-              <a:srgbClr val="00A0B0"/>
-            </a:solidFill>
-          </a:ln>
-        </p:spPr>
-        <p:style>
-          <a:lnRef idx="1">
-            <a:schemeClr val="accent1"/>
-          </a:lnRef>
-          <a:fillRef idx="3">
-            <a:schemeClr val="accent1"/>
-          </a:fillRef>
-          <a:effectRef idx="2">
-            <a:schemeClr val="accent1"/>
-          </a:effectRef>
-          <a:fontRef idx="minor">
-            <a:schemeClr val="lt1"/>
-          </a:fontRef>
-        </p:style>
-        <p:txBody>
-          <a:bodyPr rtlCol="0" anchor="ctr"/>
-          <a:lstStyle/>
-          <a:p>
-            <a:pPr algn="ctr"/>
-          </a:p>
-        </p:txBody>
-      </p:sp>
-      <p:sp>
-        <p:nvSpPr>
-          <p:cNvPr id="11" name="TextBox 10"/>
-          <p:cNvSpPr txBox="1"/>
-          <p:nvPr/>
-        </p:nvSpPr>
-        <p:spPr>
-          <a:xfrm>
-            <a:off x="2286000" y="2354580"/>
-            <a:ext cx="8686800" cy="777240"/>
-          </a:xfrm>
-          <a:prstGeom prst="rect">
-            <a:avLst/>
-          </a:prstGeom>
-          <a:noFill/>
-        </p:spPr>
-        <p:txBody>
-          <a:bodyPr wrap="square" lIns="45720" rIns="45720" tIns="18288" bIns="18288" anchor="ctr">
-            <a:spAutoFit/>
-          </a:bodyPr>
-          <a:lstStyle/>
-          <a:p>
-            <a:pPr algn="l"/>
-            <a:r>
-              <a:rPr sz="1800" b="0" i="0">
+              <a:t>▸  </a:t>
+            </a:r>
+            <a:r>
+              <a:rPr sz="2000">
                 <a:solidFill>
                   <a:srgbClr val="1A1A2E"/>
                 </a:solidFill>
                 <a:latin typeface="Calibri"/>
               </a:rPr>
-              <a:t>CVE = identificatore, CVSS = punteggio 0-10</a:t>
-            </a:r>
-          </a:p>
-        </p:txBody>
-      </p:sp>
-      <p:sp>
-        <p:nvSpPr>
-          <p:cNvPr id="12" name="Oval 11"/>
-          <p:cNvSpPr/>
-          <p:nvPr/>
-        </p:nvSpPr>
-        <p:spPr>
-          <a:xfrm>
-            <a:off x="914400" y="3268980"/>
-            <a:ext cx="777240" cy="777240"/>
-          </a:xfrm>
-          <a:prstGeom prst="ellipse">
-            <a:avLst/>
-          </a:prstGeom>
-          <a:solidFill>
-            <a:srgbClr val="00A0B0"/>
-          </a:solidFill>
-          <a:ln>
-            <a:noFill/>
-          </a:ln>
-        </p:spPr>
-        <p:style>
-          <a:lnRef idx="1">
-            <a:schemeClr val="accent1"/>
-          </a:lnRef>
-          <a:fillRef idx="3">
-            <a:schemeClr val="accent1"/>
-          </a:fillRef>
-          <a:effectRef idx="2">
-            <a:schemeClr val="accent1"/>
-          </a:effectRef>
-          <a:fontRef idx="minor">
-            <a:schemeClr val="lt1"/>
-          </a:fontRef>
-        </p:style>
-        <p:txBody>
-          <a:bodyPr rtlCol="0" anchor="ctr"/>
-          <a:lstStyle/>
-          <a:p>
-            <a:pPr algn="ctr"/>
-          </a:p>
-        </p:txBody>
-      </p:sp>
-      <p:sp>
-        <p:nvSpPr>
-          <p:cNvPr id="13" name="TextBox 12"/>
-          <p:cNvSpPr txBox="1"/>
-          <p:nvPr/>
-        </p:nvSpPr>
-        <p:spPr>
-          <a:xfrm>
-            <a:off x="914400" y="3268980"/>
-            <a:ext cx="777240" cy="777240"/>
-          </a:xfrm>
-          <a:prstGeom prst="rect">
-            <a:avLst/>
-          </a:prstGeom>
-          <a:noFill/>
-        </p:spPr>
-        <p:txBody>
-          <a:bodyPr wrap="square" lIns="45720" rIns="45720" tIns="18288" bIns="18288" anchor="ctr">
-            <a:spAutoFit/>
-          </a:bodyPr>
-          <a:lstStyle/>
-          <a:p>
-            <a:pPr algn="ctr"/>
-            <a:r>
-              <a:rPr sz="2800" b="1" i="0">
-                <a:solidFill>
-                  <a:srgbClr val="FFFFFF"/>
+              <a:t>registrazione · login · ricerca · ordine · pagamento Stripe · email</a:t>
+            </a:r>
+          </a:p>
+          <a:p>
+            <a:pPr>
+              <a:lnSpc>
+                <a:spcPct val="150000"/>
+              </a:lnSpc>
+              <a:spcAft>
+                <a:spcPts val="400"/>
+              </a:spcAft>
+            </a:pPr>
+            <a:r>
+              <a:rPr sz="2000" b="1">
+                <a:solidFill>
+                  <a:srgbClr val="00A0B0"/>
                 </a:solidFill>
                 <a:latin typeface="Calibri"/>
               </a:rPr>
-              <a:t>3</a:t>
-            </a:r>
-          </a:p>
-        </p:txBody>
-      </p:sp>
-      <p:sp>
-        <p:nvSpPr>
-          <p:cNvPr id="14" name="Rounded Rectangle 13"/>
-          <p:cNvSpPr/>
-          <p:nvPr/>
-        </p:nvSpPr>
-        <p:spPr>
-          <a:xfrm>
-            <a:off x="2011680" y="3268980"/>
-            <a:ext cx="9144000" cy="777240"/>
-          </a:xfrm>
-          <a:prstGeom prst="roundRect">
-            <a:avLst>
-              <a:gd name="adj" fmla="val 8000"/>
-            </a:avLst>
-          </a:prstGeom>
-          <a:solidFill>
-            <a:srgbClr val="FBFBFD"/>
-          </a:solidFill>
-          <a:ln w="19050">
-            <a:solidFill>
-              <a:srgbClr val="00A0B0"/>
-            </a:solidFill>
-          </a:ln>
-        </p:spPr>
-        <p:style>
-          <a:lnRef idx="1">
-            <a:schemeClr val="accent1"/>
-          </a:lnRef>
-          <a:fillRef idx="3">
-            <a:schemeClr val="accent1"/>
-          </a:fillRef>
-          <a:effectRef idx="2">
-            <a:schemeClr val="accent1"/>
-          </a:effectRef>
-          <a:fontRef idx="minor">
-            <a:schemeClr val="lt1"/>
-          </a:fontRef>
-        </p:style>
-        <p:txBody>
-          <a:bodyPr rtlCol="0" anchor="ctr"/>
-          <a:lstStyle/>
-          <a:p>
-            <a:pPr algn="ctr"/>
-          </a:p>
-        </p:txBody>
-      </p:sp>
-      <p:sp>
-        <p:nvSpPr>
-          <p:cNvPr id="15" name="TextBox 14"/>
-          <p:cNvSpPr txBox="1"/>
-          <p:nvPr/>
-        </p:nvSpPr>
-        <p:spPr>
-          <a:xfrm>
-            <a:off x="2286000" y="3268980"/>
-            <a:ext cx="8686800" cy="777240"/>
-          </a:xfrm>
-          <a:prstGeom prst="rect">
-            <a:avLst/>
-          </a:prstGeom>
-          <a:noFill/>
-        </p:spPr>
-        <p:txBody>
-          <a:bodyPr wrap="square" lIns="45720" rIns="45720" tIns="18288" bIns="18288" anchor="ctr">
-            <a:spAutoFit/>
-          </a:bodyPr>
-          <a:lstStyle/>
-          <a:p>
-            <a:pPr algn="l"/>
-            <a:r>
-              <a:rPr sz="1800" b="0" i="0">
+              <a:t>▸  </a:t>
+            </a:r>
+            <a:r>
+              <a:rPr sz="2000">
                 <a:solidFill>
                   <a:srgbClr val="1A1A2E"/>
                 </a:solidFill>
                 <a:latin typeface="Calibri"/>
               </a:rPr>
-              <a:t>Threat modeling = 4 domande di Shostack</a:t>
-            </a:r>
-          </a:p>
-        </p:txBody>
-      </p:sp>
-      <p:sp>
-        <p:nvSpPr>
-          <p:cNvPr id="16" name="Oval 15"/>
-          <p:cNvSpPr/>
-          <p:nvPr/>
-        </p:nvSpPr>
-        <p:spPr>
-          <a:xfrm>
-            <a:off x="914400" y="4183380"/>
-            <a:ext cx="777240" cy="777240"/>
-          </a:xfrm>
-          <a:prstGeom prst="ellipse">
-            <a:avLst/>
-          </a:prstGeom>
-          <a:solidFill>
-            <a:srgbClr val="00A0B0"/>
-          </a:solidFill>
-          <a:ln>
-            <a:noFill/>
-          </a:ln>
-        </p:spPr>
-        <p:style>
-          <a:lnRef idx="1">
-            <a:schemeClr val="accent1"/>
-          </a:lnRef>
-          <a:fillRef idx="3">
-            <a:schemeClr val="accent1"/>
-          </a:fillRef>
-          <a:effectRef idx="2">
-            <a:schemeClr val="accent1"/>
-          </a:effectRef>
-          <a:fontRef idx="minor">
-            <a:schemeClr val="lt1"/>
-          </a:fontRef>
-        </p:style>
-        <p:txBody>
-          <a:bodyPr rtlCol="0" anchor="ctr"/>
-          <a:lstStyle/>
-          <a:p>
-            <a:pPr algn="ctr"/>
-          </a:p>
-        </p:txBody>
-      </p:sp>
-      <p:sp>
-        <p:nvSpPr>
-          <p:cNvPr id="17" name="TextBox 16"/>
-          <p:cNvSpPr txBox="1"/>
-          <p:nvPr/>
-        </p:nvSpPr>
-        <p:spPr>
-          <a:xfrm>
-            <a:off x="914400" y="4183380"/>
-            <a:ext cx="777240" cy="777240"/>
-          </a:xfrm>
-          <a:prstGeom prst="rect">
-            <a:avLst/>
-          </a:prstGeom>
-          <a:noFill/>
-        </p:spPr>
-        <p:txBody>
-          <a:bodyPr wrap="square" lIns="45720" rIns="45720" tIns="18288" bIns="18288" anchor="ctr">
-            <a:spAutoFit/>
-          </a:bodyPr>
-          <a:lstStyle/>
-          <a:p>
-            <a:pPr algn="ctr"/>
-            <a:r>
-              <a:rPr sz="2800" b="1" i="0">
-                <a:solidFill>
-                  <a:srgbClr val="FFFFFF"/>
+              <a:t/>
+            </a:r>
+          </a:p>
+          <a:p>
+            <a:pPr>
+              <a:lnSpc>
+                <a:spcPct val="150000"/>
+              </a:lnSpc>
+              <a:spcAft>
+                <a:spcPts val="400"/>
+              </a:spcAft>
+            </a:pPr>
+            <a:r>
+              <a:rPr sz="2000" b="1">
+                <a:solidFill>
+                  <a:srgbClr val="00A0B0"/>
                 </a:solidFill>
                 <a:latin typeface="Calibri"/>
               </a:rPr>
-              <a:t>4</a:t>
-            </a:r>
-          </a:p>
-        </p:txBody>
-      </p:sp>
-      <p:sp>
-        <p:nvSpPr>
-          <p:cNvPr id="18" name="Rounded Rectangle 17"/>
-          <p:cNvSpPr/>
-          <p:nvPr/>
-        </p:nvSpPr>
-        <p:spPr>
-          <a:xfrm>
-            <a:off x="2011680" y="4183380"/>
-            <a:ext cx="9144000" cy="777240"/>
-          </a:xfrm>
-          <a:prstGeom prst="roundRect">
-            <a:avLst>
-              <a:gd name="adj" fmla="val 8000"/>
-            </a:avLst>
-          </a:prstGeom>
-          <a:solidFill>
-            <a:srgbClr val="FBFBFD"/>
-          </a:solidFill>
-          <a:ln w="19050">
-            <a:solidFill>
-              <a:srgbClr val="00A0B0"/>
-            </a:solidFill>
-          </a:ln>
-        </p:spPr>
-        <p:style>
-          <a:lnRef idx="1">
-            <a:schemeClr val="accent1"/>
-          </a:lnRef>
-          <a:fillRef idx="3">
-            <a:schemeClr val="accent1"/>
-          </a:fillRef>
-          <a:effectRef idx="2">
-            <a:schemeClr val="accent1"/>
-          </a:effectRef>
-          <a:fontRef idx="minor">
-            <a:schemeClr val="lt1"/>
-          </a:fontRef>
-        </p:style>
-        <p:txBody>
-          <a:bodyPr rtlCol="0" anchor="ctr"/>
-          <a:lstStyle/>
-          <a:p>
-            <a:pPr algn="ctr"/>
-          </a:p>
-        </p:txBody>
-      </p:sp>
-      <p:sp>
-        <p:nvSpPr>
-          <p:cNvPr id="19" name="TextBox 18"/>
-          <p:cNvSpPr txBox="1"/>
-          <p:nvPr/>
-        </p:nvSpPr>
-        <p:spPr>
-          <a:xfrm>
-            <a:off x="2286000" y="4183380"/>
-            <a:ext cx="8686800" cy="777240"/>
-          </a:xfrm>
-          <a:prstGeom prst="rect">
-            <a:avLst/>
-          </a:prstGeom>
-          <a:noFill/>
-        </p:spPr>
-        <p:txBody>
-          <a:bodyPr wrap="square" lIns="45720" rIns="45720" tIns="18288" bIns="18288" anchor="ctr">
-            <a:spAutoFit/>
-          </a:bodyPr>
-          <a:lstStyle/>
-          <a:p>
-            <a:pPr algn="l"/>
-            <a:r>
-              <a:rPr sz="1800" b="0" i="0">
+              <a:t>▸  </a:t>
+            </a:r>
+            <a:r>
+              <a:rPr sz="2000">
                 <a:solidFill>
                   <a:srgbClr val="1A1A2E"/>
                 </a:solidFill>
                 <a:latin typeface="Calibri"/>
               </a:rPr>
-              <a:t>STRIDE = checklist sistematica, 6 categorie</a:t>
-            </a:r>
-          </a:p>
-        </p:txBody>
-      </p:sp>
-      <p:sp>
-        <p:nvSpPr>
-          <p:cNvPr id="20" name="Oval 19"/>
-          <p:cNvSpPr/>
-          <p:nvPr/>
-        </p:nvSpPr>
-        <p:spPr>
-          <a:xfrm>
-            <a:off x="914400" y="5097780"/>
-            <a:ext cx="777240" cy="777240"/>
-          </a:xfrm>
-          <a:prstGeom prst="ellipse">
-            <a:avLst/>
-          </a:prstGeom>
-          <a:solidFill>
-            <a:srgbClr val="00A0B0"/>
-          </a:solidFill>
-          <a:ln>
-            <a:noFill/>
-          </a:ln>
-        </p:spPr>
-        <p:style>
-          <a:lnRef idx="1">
-            <a:schemeClr val="accent1"/>
-          </a:lnRef>
-          <a:fillRef idx="3">
-            <a:schemeClr val="accent1"/>
-          </a:fillRef>
-          <a:effectRef idx="2">
-            <a:schemeClr val="accent1"/>
-          </a:effectRef>
-          <a:fontRef idx="minor">
-            <a:schemeClr val="lt1"/>
-          </a:fontRef>
-        </p:style>
-        <p:txBody>
-          <a:bodyPr rtlCol="0" anchor="ctr"/>
-          <a:lstStyle/>
-          <a:p>
-            <a:pPr algn="ctr"/>
-          </a:p>
-        </p:txBody>
-      </p:sp>
-      <p:sp>
-        <p:nvSpPr>
-          <p:cNvPr id="21" name="TextBox 20"/>
-          <p:cNvSpPr txBox="1"/>
-          <p:nvPr/>
-        </p:nvSpPr>
-        <p:spPr>
-          <a:xfrm>
-            <a:off x="914400" y="5097780"/>
-            <a:ext cx="777240" cy="777240"/>
-          </a:xfrm>
-          <a:prstGeom prst="rect">
-            <a:avLst/>
-          </a:prstGeom>
-          <a:noFill/>
-        </p:spPr>
-        <p:txBody>
-          <a:bodyPr wrap="square" lIns="45720" rIns="45720" tIns="18288" bIns="18288" anchor="ctr">
-            <a:spAutoFit/>
-          </a:bodyPr>
-          <a:lstStyle/>
-          <a:p>
-            <a:pPr algn="ctr"/>
-            <a:r>
-              <a:rPr sz="2800" b="1" i="0">
-                <a:solidFill>
-                  <a:srgbClr val="FFFFFF"/>
+              <a:t>Output richiesto:</a:t>
+            </a:r>
+          </a:p>
+          <a:p>
+            <a:pPr>
+              <a:lnSpc>
+                <a:spcPct val="150000"/>
+              </a:lnSpc>
+              <a:spcAft>
+                <a:spcPts val="400"/>
+              </a:spcAft>
+            </a:pPr>
+            <a:r>
+              <a:rPr sz="2000" b="1">
+                <a:solidFill>
+                  <a:srgbClr val="00A0B0"/>
                 </a:solidFill>
                 <a:latin typeface="Calibri"/>
               </a:rPr>
-              <a:t>5</a:t>
-            </a:r>
-          </a:p>
-        </p:txBody>
-      </p:sp>
-      <p:sp>
-        <p:nvSpPr>
-          <p:cNvPr id="22" name="Rounded Rectangle 21"/>
-          <p:cNvSpPr/>
-          <p:nvPr/>
-        </p:nvSpPr>
-        <p:spPr>
-          <a:xfrm>
-            <a:off x="2011680" y="5097780"/>
-            <a:ext cx="9144000" cy="777240"/>
-          </a:xfrm>
-          <a:prstGeom prst="roundRect">
-            <a:avLst>
-              <a:gd name="adj" fmla="val 8000"/>
-            </a:avLst>
-          </a:prstGeom>
-          <a:solidFill>
-            <a:srgbClr val="FBFBFD"/>
-          </a:solidFill>
-          <a:ln w="19050">
-            <a:solidFill>
-              <a:srgbClr val="00A0B0"/>
-            </a:solidFill>
-          </a:ln>
-        </p:spPr>
-        <p:style>
-          <a:lnRef idx="1">
-            <a:schemeClr val="accent1"/>
-          </a:lnRef>
-          <a:fillRef idx="3">
-            <a:schemeClr val="accent1"/>
-          </a:fillRef>
-          <a:effectRef idx="2">
-            <a:schemeClr val="accent1"/>
-          </a:effectRef>
-          <a:fontRef idx="minor">
-            <a:schemeClr val="lt1"/>
-          </a:fontRef>
-        </p:style>
-        <p:txBody>
-          <a:bodyPr rtlCol="0" anchor="ctr"/>
-          <a:lstStyle/>
-          <a:p>
-            <a:pPr algn="ctr"/>
-          </a:p>
-        </p:txBody>
-      </p:sp>
-      <p:sp>
-        <p:nvSpPr>
-          <p:cNvPr id="23" name="TextBox 22"/>
-          <p:cNvSpPr txBox="1"/>
-          <p:nvPr/>
-        </p:nvSpPr>
-        <p:spPr>
-          <a:xfrm>
-            <a:off x="2286000" y="5097780"/>
-            <a:ext cx="8686800" cy="777240"/>
-          </a:xfrm>
-          <a:prstGeom prst="rect">
-            <a:avLst/>
-          </a:prstGeom>
-          <a:noFill/>
-        </p:spPr>
-        <p:txBody>
-          <a:bodyPr wrap="square" lIns="45720" rIns="45720" tIns="18288" bIns="18288" anchor="ctr">
-            <a:spAutoFit/>
-          </a:bodyPr>
-          <a:lstStyle/>
-          <a:p>
-            <a:pPr algn="l"/>
-            <a:r>
-              <a:rPr sz="1800" b="0" i="0">
+              <a:t>▸  </a:t>
+            </a:r>
+            <a:r>
+              <a:rPr sz="2000">
                 <a:solidFill>
                   <a:srgbClr val="1A1A2E"/>
                 </a:solidFill>
                 <a:latin typeface="Calibri"/>
               </a:rPr>
-              <a:t>Trust boundary = ogni attraversamento è opportunità d'attacco</a:t>
+              <a:t>Disegno DFD (≥4 processi, 2 datastore, 2 trust boundary)</a:t>
+            </a:r>
+          </a:p>
+          <a:p>
+            <a:pPr>
+              <a:lnSpc>
+                <a:spcPct val="150000"/>
+              </a:lnSpc>
+              <a:spcAft>
+                <a:spcPts val="400"/>
+              </a:spcAft>
+            </a:pPr>
+            <a:r>
+              <a:rPr sz="2000" b="1">
+                <a:solidFill>
+                  <a:srgbClr val="00A0B0"/>
+                </a:solidFill>
+                <a:latin typeface="Calibri"/>
+              </a:rPr>
+              <a:t>▸  </a:t>
+            </a:r>
+            <a:r>
+              <a:rPr sz="2000">
+                <a:solidFill>
+                  <a:srgbClr val="1A1A2E"/>
+                </a:solidFill>
+                <a:latin typeface="Calibri"/>
+              </a:rPr>
+              <a:t>Tabella STRIDE con ≥8 minacce sparse tra le 6 categorie</a:t>
+            </a:r>
+          </a:p>
+          <a:p>
+            <a:pPr>
+              <a:lnSpc>
+                <a:spcPct val="150000"/>
+              </a:lnSpc>
+              <a:spcAft>
+                <a:spcPts val="400"/>
+              </a:spcAft>
+            </a:pPr>
+            <a:r>
+              <a:rPr sz="2000" b="1">
+                <a:solidFill>
+                  <a:srgbClr val="00A0B0"/>
+                </a:solidFill>
+                <a:latin typeface="Calibri"/>
+              </a:rPr>
+              <a:t>▸  </a:t>
+            </a:r>
+            <a:r>
+              <a:rPr sz="2000">
+                <a:solidFill>
+                  <a:srgbClr val="1A1A2E"/>
+                </a:solidFill>
+                <a:latin typeface="Calibri"/>
+              </a:rPr>
+              <a:t>Una mitigazione per ogni minaccia</a:t>
             </a:r>
           </a:p>
         </p:txBody>
       </p:sp>
       <p:cxnSp>
         <p:nvCxnSpPr>
-          <p:cNvPr id="24" name="Connector 23"/>
+          <p:cNvPr id="5" name="Connector 4"/>
           <p:cNvCxnSpPr/>
           <p:nvPr/>
         </p:nvCxnSpPr>
@@ -5885,7 +5145,7 @@
       </p:cxnSp>
       <p:sp>
         <p:nvSpPr>
-          <p:cNvPr id="25" name="TextBox 24"/>
+          <p:cNvPr id="6" name="TextBox 5"/>
           <p:cNvSpPr txBox="1"/>
           <p:nvPr/>
         </p:nvSpPr>
@@ -5920,7 +5180,7 @@
       </p:sp>
       <p:sp>
         <p:nvSpPr>
-          <p:cNvPr id="26" name="TextBox 25"/>
+          <p:cNvPr id="7" name="TextBox 6"/>
           <p:cNvSpPr txBox="1"/>
           <p:nvPr/>
         </p:nvSpPr>
@@ -5948,7 +5208,7 @@
                 </a:solidFill>
                 <a:latin typeface="Calibri"/>
               </a:rPr>
-              <a:t>L2  ·  12/14</a:t>
+              <a:t>L2  ·  12/15</a:t>
             </a:r>
           </a:p>
         </p:txBody>
@@ -5980,13 +5240,13 @@
         <p:spPr>
           <a:xfrm>
             <a:off x="0" y="0"/>
-            <a:ext cx="4114800" cy="6858000"/>
+            <a:ext cx="12191695" cy="777240"/>
           </a:xfrm>
           <a:prstGeom prst="rect">
             <a:avLst/>
           </a:prstGeom>
           <a:solidFill>
-            <a:srgbClr val="081B33"/>
+            <a:srgbClr val="0F2D52"/>
           </a:solidFill>
           <a:ln>
             <a:noFill/>
@@ -6016,59 +5276,51 @@
       </p:sp>
       <p:sp>
         <p:nvSpPr>
-          <p:cNvPr id="3" name="Rectangle 2"/>
+          <p:cNvPr id="3" name="TextBox 2"/>
+          <p:cNvSpPr txBox="1"/>
+          <p:nvPr/>
+        </p:nvSpPr>
+        <p:spPr>
+          <a:xfrm>
+            <a:off x="457200" y="164592"/>
+            <a:ext cx="10972800" cy="502920"/>
+          </a:xfrm>
+          <a:prstGeom prst="rect">
+            <a:avLst/>
+          </a:prstGeom>
+          <a:noFill/>
+        </p:spPr>
+        <p:txBody>
+          <a:bodyPr wrap="square" lIns="45720" rIns="45720" tIns="18288" bIns="18288" anchor="ctr">
+            <a:spAutoFit/>
+          </a:bodyPr>
+          <a:lstStyle/>
+          <a:p>
+            <a:pPr algn="l"/>
+            <a:r>
+              <a:rPr sz="2400" b="1" i="0">
+                <a:solidFill>
+                  <a:srgbClr val="FFFFFF"/>
+                </a:solidFill>
+                <a:latin typeface="Calibri"/>
+              </a:rPr>
+              <a:t>📌  Cosa portare a casa</a:t>
+            </a:r>
+          </a:p>
+        </p:txBody>
+      </p:sp>
+      <p:sp>
+        <p:nvSpPr>
+          <p:cNvPr id="4" name="Oval 3"/>
           <p:cNvSpPr/>
           <p:nvPr/>
         </p:nvSpPr>
         <p:spPr>
           <a:xfrm>
-            <a:off x="4114800" y="0"/>
-            <a:ext cx="8046720" cy="6858000"/>
-          </a:xfrm>
-          <a:prstGeom prst="rect">
-            <a:avLst/>
-          </a:prstGeom>
-          <a:solidFill>
-            <a:srgbClr val="F1F4F8"/>
-          </a:solidFill>
-          <a:ln>
-            <a:noFill/>
-          </a:ln>
-        </p:spPr>
-        <p:style>
-          <a:lnRef idx="1">
-            <a:schemeClr val="accent1"/>
-          </a:lnRef>
-          <a:fillRef idx="3">
-            <a:schemeClr val="accent1"/>
-          </a:fillRef>
-          <a:effectRef idx="2">
-            <a:schemeClr val="accent1"/>
-          </a:effectRef>
-          <a:fontRef idx="minor">
-            <a:schemeClr val="lt1"/>
-          </a:fontRef>
-        </p:style>
-        <p:txBody>
-          <a:bodyPr rtlCol="0" anchor="ctr"/>
-          <a:lstStyle/>
-          <a:p>
-            <a:pPr algn="ctr"/>
-          </a:p>
-        </p:txBody>
-      </p:sp>
-      <p:sp>
-        <p:nvSpPr>
-          <p:cNvPr id="4" name="Rectangle 3"/>
-          <p:cNvSpPr/>
-          <p:nvPr/>
-        </p:nvSpPr>
-        <p:spPr>
-          <a:xfrm>
-            <a:off x="4114800" y="0"/>
-            <a:ext cx="137160" cy="6858000"/>
-          </a:xfrm>
-          <a:prstGeom prst="rect">
+            <a:off x="914400" y="1440180"/>
+            <a:ext cx="777240" cy="777240"/>
+          </a:xfrm>
+          <a:prstGeom prst="ellipse">
             <a:avLst/>
           </a:prstGeom>
           <a:solidFill>
@@ -6108,8 +5360,8 @@
         </p:nvSpPr>
         <p:spPr>
           <a:xfrm>
-            <a:off x="274320" y="2103120"/>
-            <a:ext cx="3657600" cy="2286000"/>
+            <a:off x="914400" y="1440180"/>
+            <a:ext cx="777240" cy="777240"/>
           </a:xfrm>
           <a:prstGeom prst="rect">
             <a:avLst/>
@@ -6117,34 +5369,81 @@
           <a:noFill/>
         </p:spPr>
         <p:txBody>
-          <a:bodyPr wrap="square" lIns="45720" rIns="45720" tIns="18288" bIns="18288" anchor="t">
+          <a:bodyPr wrap="square" lIns="45720" rIns="45720" tIns="18288" bIns="18288" anchor="ctr">
             <a:spAutoFit/>
           </a:bodyPr>
           <a:lstStyle/>
           <a:p>
             <a:pPr algn="ctr"/>
             <a:r>
-              <a:rPr sz="17000" b="1" i="0">
-                <a:solidFill>
-                  <a:srgbClr val="00A0B0"/>
+              <a:rPr sz="2800" b="1" i="0">
+                <a:solidFill>
+                  <a:srgbClr val="FFFFFF"/>
                 </a:solidFill>
                 <a:latin typeface="Calibri"/>
               </a:rPr>
-              <a:t>03</a:t>
-            </a:r>
-          </a:p>
-        </p:txBody>
-      </p:sp>
-      <p:sp>
-        <p:nvSpPr>
-          <p:cNvPr id="6" name="TextBox 5"/>
+              <a:t>1</a:t>
+            </a:r>
+          </a:p>
+        </p:txBody>
+      </p:sp>
+      <p:sp>
+        <p:nvSpPr>
+          <p:cNvPr id="6" name="Rounded Rectangle 5"/>
+          <p:cNvSpPr/>
+          <p:nvPr/>
+        </p:nvSpPr>
+        <p:spPr>
+          <a:xfrm>
+            <a:off x="2011680" y="1440180"/>
+            <a:ext cx="9144000" cy="777240"/>
+          </a:xfrm>
+          <a:prstGeom prst="roundRect">
+            <a:avLst>
+              <a:gd name="adj" fmla="val 8000"/>
+            </a:avLst>
+          </a:prstGeom>
+          <a:solidFill>
+            <a:srgbClr val="FBFBFD"/>
+          </a:solidFill>
+          <a:ln w="19050">
+            <a:solidFill>
+              <a:srgbClr val="00A0B0"/>
+            </a:solidFill>
+          </a:ln>
+        </p:spPr>
+        <p:style>
+          <a:lnRef idx="1">
+            <a:schemeClr val="accent1"/>
+          </a:lnRef>
+          <a:fillRef idx="3">
+            <a:schemeClr val="accent1"/>
+          </a:fillRef>
+          <a:effectRef idx="2">
+            <a:schemeClr val="accent1"/>
+          </a:effectRef>
+          <a:fontRef idx="minor">
+            <a:schemeClr val="lt1"/>
+          </a:fontRef>
+        </p:style>
+        <p:txBody>
+          <a:bodyPr rtlCol="0" anchor="ctr"/>
+          <a:lstStyle/>
+          <a:p>
+            <a:pPr algn="ctr"/>
+          </a:p>
+        </p:txBody>
+      </p:sp>
+      <p:sp>
+        <p:nvSpPr>
+          <p:cNvPr id="7" name="TextBox 6"/>
           <p:cNvSpPr txBox="1"/>
           <p:nvPr/>
         </p:nvSpPr>
         <p:spPr>
           <a:xfrm>
-            <a:off x="274320" y="4572000"/>
-            <a:ext cx="3657600" cy="457200"/>
+            <a:off x="2286000" y="1440180"/>
+            <a:ext cx="8686800" cy="777240"/>
           </a:xfrm>
           <a:prstGeom prst="rect">
             <a:avLst/>
@@ -6152,34 +5451,77 @@
           <a:noFill/>
         </p:spPr>
         <p:txBody>
-          <a:bodyPr wrap="square" lIns="45720" rIns="45720" tIns="18288" bIns="18288" anchor="t">
+          <a:bodyPr wrap="square" lIns="45720" rIns="45720" tIns="18288" bIns="18288" anchor="ctr">
             <a:spAutoFit/>
           </a:bodyPr>
           <a:lstStyle/>
           <a:p>
+            <a:pPr algn="l"/>
+            <a:r>
+              <a:rPr sz="1800" b="0" i="0">
+                <a:solidFill>
+                  <a:srgbClr val="1A1A2E"/>
+                </a:solidFill>
+                <a:latin typeface="Calibri"/>
+              </a:rPr>
+              <a:t>OWASP Top 10: impara almeno i primi 5 a memoria</a:t>
+            </a:r>
+          </a:p>
+        </p:txBody>
+      </p:sp>
+      <p:sp>
+        <p:nvSpPr>
+          <p:cNvPr id="8" name="Oval 7"/>
+          <p:cNvSpPr/>
+          <p:nvPr/>
+        </p:nvSpPr>
+        <p:spPr>
+          <a:xfrm>
+            <a:off x="914400" y="2354580"/>
+            <a:ext cx="777240" cy="777240"/>
+          </a:xfrm>
+          <a:prstGeom prst="ellipse">
+            <a:avLst/>
+          </a:prstGeom>
+          <a:solidFill>
+            <a:srgbClr val="00A0B0"/>
+          </a:solidFill>
+          <a:ln>
+            <a:noFill/>
+          </a:ln>
+        </p:spPr>
+        <p:style>
+          <a:lnRef idx="1">
+            <a:schemeClr val="accent1"/>
+          </a:lnRef>
+          <a:fillRef idx="3">
+            <a:schemeClr val="accent1"/>
+          </a:fillRef>
+          <a:effectRef idx="2">
+            <a:schemeClr val="accent1"/>
+          </a:effectRef>
+          <a:fontRef idx="minor">
+            <a:schemeClr val="lt1"/>
+          </a:fontRef>
+        </p:style>
+        <p:txBody>
+          <a:bodyPr rtlCol="0" anchor="ctr"/>
+          <a:lstStyle/>
+          <a:p>
             <a:pPr algn="ctr"/>
-            <a:r>
-              <a:rPr sz="2000" b="1" i="0">
-                <a:solidFill>
-                  <a:srgbClr val="6FD8E0"/>
-                </a:solidFill>
-                <a:latin typeface="Calibri"/>
-              </a:rPr>
-              <a:t>PARTE</a:t>
-            </a:r>
-          </a:p>
-        </p:txBody>
-      </p:sp>
-      <p:sp>
-        <p:nvSpPr>
-          <p:cNvPr id="7" name="TextBox 6"/>
+          </a:p>
+        </p:txBody>
+      </p:sp>
+      <p:sp>
+        <p:nvSpPr>
+          <p:cNvPr id="9" name="TextBox 8"/>
           <p:cNvSpPr txBox="1"/>
           <p:nvPr/>
         </p:nvSpPr>
         <p:spPr>
           <a:xfrm>
-            <a:off x="4572000" y="2286000"/>
-            <a:ext cx="7315200" cy="1645920"/>
+            <a:off x="914400" y="2354580"/>
+            <a:ext cx="777240" cy="777240"/>
           </a:xfrm>
           <a:prstGeom prst="rect">
             <a:avLst/>
@@ -6187,34 +5529,81 @@
           <a:noFill/>
         </p:spPr>
         <p:txBody>
-          <a:bodyPr wrap="square" lIns="45720" rIns="45720" tIns="18288" bIns="18288" anchor="t">
+          <a:bodyPr wrap="square" lIns="45720" rIns="45720" tIns="18288" bIns="18288" anchor="ctr">
             <a:spAutoFit/>
           </a:bodyPr>
           <a:lstStyle/>
           <a:p>
-            <a:pPr algn="l"/>
-            <a:r>
-              <a:rPr sz="4400" b="1" i="0">
-                <a:solidFill>
-                  <a:srgbClr val="0F2D52"/>
+            <a:pPr algn="ctr"/>
+            <a:r>
+              <a:rPr sz="2800" b="1" i="0">
+                <a:solidFill>
+                  <a:srgbClr val="FFFFFF"/>
                 </a:solidFill>
                 <a:latin typeface="Calibri"/>
               </a:rPr>
-              <a:t>Per approfondire</a:t>
-            </a:r>
-          </a:p>
-        </p:txBody>
-      </p:sp>
-      <p:sp>
-        <p:nvSpPr>
-          <p:cNvPr id="8" name="TextBox 7"/>
+              <a:t>2</a:t>
+            </a:r>
+          </a:p>
+        </p:txBody>
+      </p:sp>
+      <p:sp>
+        <p:nvSpPr>
+          <p:cNvPr id="10" name="Rounded Rectangle 9"/>
+          <p:cNvSpPr/>
+          <p:nvPr/>
+        </p:nvSpPr>
+        <p:spPr>
+          <a:xfrm>
+            <a:off x="2011680" y="2354580"/>
+            <a:ext cx="9144000" cy="777240"/>
+          </a:xfrm>
+          <a:prstGeom prst="roundRect">
+            <a:avLst>
+              <a:gd name="adj" fmla="val 8000"/>
+            </a:avLst>
+          </a:prstGeom>
+          <a:solidFill>
+            <a:srgbClr val="FBFBFD"/>
+          </a:solidFill>
+          <a:ln w="19050">
+            <a:solidFill>
+              <a:srgbClr val="00A0B0"/>
+            </a:solidFill>
+          </a:ln>
+        </p:spPr>
+        <p:style>
+          <a:lnRef idx="1">
+            <a:schemeClr val="accent1"/>
+          </a:lnRef>
+          <a:fillRef idx="3">
+            <a:schemeClr val="accent1"/>
+          </a:fillRef>
+          <a:effectRef idx="2">
+            <a:schemeClr val="accent1"/>
+          </a:effectRef>
+          <a:fontRef idx="minor">
+            <a:schemeClr val="lt1"/>
+          </a:fontRef>
+        </p:style>
+        <p:txBody>
+          <a:bodyPr rtlCol="0" anchor="ctr"/>
+          <a:lstStyle/>
+          <a:p>
+            <a:pPr algn="ctr"/>
+          </a:p>
+        </p:txBody>
+      </p:sp>
+      <p:sp>
+        <p:nvSpPr>
+          <p:cNvPr id="11" name="TextBox 10"/>
           <p:cNvSpPr txBox="1"/>
           <p:nvPr/>
         </p:nvSpPr>
         <p:spPr>
           <a:xfrm>
-            <a:off x="4572000" y="3931920"/>
-            <a:ext cx="7315200" cy="1828800"/>
+            <a:off x="2286000" y="2354580"/>
+            <a:ext cx="8686800" cy="777240"/>
           </a:xfrm>
           <a:prstGeom prst="rect">
             <a:avLst/>
@@ -6222,27 +5611,507 @@
           <a:noFill/>
         </p:spPr>
         <p:txBody>
-          <a:bodyPr wrap="square" lIns="45720" rIns="45720" tIns="18288" bIns="18288" anchor="t">
+          <a:bodyPr wrap="square" lIns="45720" rIns="45720" tIns="18288" bIns="18288" anchor="ctr">
             <a:spAutoFit/>
           </a:bodyPr>
           <a:lstStyle/>
           <a:p>
             <a:pPr algn="l"/>
             <a:r>
-              <a:rPr sz="1800" b="0" i="1">
-                <a:solidFill>
-                  <a:srgbClr val="6B7280"/>
+              <a:rPr sz="1800" b="0" i="0">
+                <a:solidFill>
+                  <a:srgbClr val="1A1A2E"/>
                 </a:solidFill>
                 <a:latin typeface="Calibri"/>
               </a:rPr>
-              <a:t>Cosa leggere prima della prossima lezione</a:t>
+              <a:t>CVE = identificatore, CVSS = punteggio 0-10</a:t>
+            </a:r>
+          </a:p>
+        </p:txBody>
+      </p:sp>
+      <p:sp>
+        <p:nvSpPr>
+          <p:cNvPr id="12" name="Oval 11"/>
+          <p:cNvSpPr/>
+          <p:nvPr/>
+        </p:nvSpPr>
+        <p:spPr>
+          <a:xfrm>
+            <a:off x="914400" y="3268980"/>
+            <a:ext cx="777240" cy="777240"/>
+          </a:xfrm>
+          <a:prstGeom prst="ellipse">
+            <a:avLst/>
+          </a:prstGeom>
+          <a:solidFill>
+            <a:srgbClr val="00A0B0"/>
+          </a:solidFill>
+          <a:ln>
+            <a:noFill/>
+          </a:ln>
+        </p:spPr>
+        <p:style>
+          <a:lnRef idx="1">
+            <a:schemeClr val="accent1"/>
+          </a:lnRef>
+          <a:fillRef idx="3">
+            <a:schemeClr val="accent1"/>
+          </a:fillRef>
+          <a:effectRef idx="2">
+            <a:schemeClr val="accent1"/>
+          </a:effectRef>
+          <a:fontRef idx="minor">
+            <a:schemeClr val="lt1"/>
+          </a:fontRef>
+        </p:style>
+        <p:txBody>
+          <a:bodyPr rtlCol="0" anchor="ctr"/>
+          <a:lstStyle/>
+          <a:p>
+            <a:pPr algn="ctr"/>
+          </a:p>
+        </p:txBody>
+      </p:sp>
+      <p:sp>
+        <p:nvSpPr>
+          <p:cNvPr id="13" name="TextBox 12"/>
+          <p:cNvSpPr txBox="1"/>
+          <p:nvPr/>
+        </p:nvSpPr>
+        <p:spPr>
+          <a:xfrm>
+            <a:off x="914400" y="3268980"/>
+            <a:ext cx="777240" cy="777240"/>
+          </a:xfrm>
+          <a:prstGeom prst="rect">
+            <a:avLst/>
+          </a:prstGeom>
+          <a:noFill/>
+        </p:spPr>
+        <p:txBody>
+          <a:bodyPr wrap="square" lIns="45720" rIns="45720" tIns="18288" bIns="18288" anchor="ctr">
+            <a:spAutoFit/>
+          </a:bodyPr>
+          <a:lstStyle/>
+          <a:p>
+            <a:pPr algn="ctr"/>
+            <a:r>
+              <a:rPr sz="2800" b="1" i="0">
+                <a:solidFill>
+                  <a:srgbClr val="FFFFFF"/>
+                </a:solidFill>
+                <a:latin typeface="Calibri"/>
+              </a:rPr>
+              <a:t>3</a:t>
+            </a:r>
+          </a:p>
+        </p:txBody>
+      </p:sp>
+      <p:sp>
+        <p:nvSpPr>
+          <p:cNvPr id="14" name="Rounded Rectangle 13"/>
+          <p:cNvSpPr/>
+          <p:nvPr/>
+        </p:nvSpPr>
+        <p:spPr>
+          <a:xfrm>
+            <a:off x="2011680" y="3268980"/>
+            <a:ext cx="9144000" cy="777240"/>
+          </a:xfrm>
+          <a:prstGeom prst="roundRect">
+            <a:avLst>
+              <a:gd name="adj" fmla="val 8000"/>
+            </a:avLst>
+          </a:prstGeom>
+          <a:solidFill>
+            <a:srgbClr val="FBFBFD"/>
+          </a:solidFill>
+          <a:ln w="19050">
+            <a:solidFill>
+              <a:srgbClr val="00A0B0"/>
+            </a:solidFill>
+          </a:ln>
+        </p:spPr>
+        <p:style>
+          <a:lnRef idx="1">
+            <a:schemeClr val="accent1"/>
+          </a:lnRef>
+          <a:fillRef idx="3">
+            <a:schemeClr val="accent1"/>
+          </a:fillRef>
+          <a:effectRef idx="2">
+            <a:schemeClr val="accent1"/>
+          </a:effectRef>
+          <a:fontRef idx="minor">
+            <a:schemeClr val="lt1"/>
+          </a:fontRef>
+        </p:style>
+        <p:txBody>
+          <a:bodyPr rtlCol="0" anchor="ctr"/>
+          <a:lstStyle/>
+          <a:p>
+            <a:pPr algn="ctr"/>
+          </a:p>
+        </p:txBody>
+      </p:sp>
+      <p:sp>
+        <p:nvSpPr>
+          <p:cNvPr id="15" name="TextBox 14"/>
+          <p:cNvSpPr txBox="1"/>
+          <p:nvPr/>
+        </p:nvSpPr>
+        <p:spPr>
+          <a:xfrm>
+            <a:off x="2286000" y="3268980"/>
+            <a:ext cx="8686800" cy="777240"/>
+          </a:xfrm>
+          <a:prstGeom prst="rect">
+            <a:avLst/>
+          </a:prstGeom>
+          <a:noFill/>
+        </p:spPr>
+        <p:txBody>
+          <a:bodyPr wrap="square" lIns="45720" rIns="45720" tIns="18288" bIns="18288" anchor="ctr">
+            <a:spAutoFit/>
+          </a:bodyPr>
+          <a:lstStyle/>
+          <a:p>
+            <a:pPr algn="l"/>
+            <a:r>
+              <a:rPr sz="1800" b="0" i="0">
+                <a:solidFill>
+                  <a:srgbClr val="1A1A2E"/>
+                </a:solidFill>
+                <a:latin typeface="Calibri"/>
+              </a:rPr>
+              <a:t>Threat modeling = 4 domande di Shostack</a:t>
+            </a:r>
+          </a:p>
+        </p:txBody>
+      </p:sp>
+      <p:sp>
+        <p:nvSpPr>
+          <p:cNvPr id="16" name="Oval 15"/>
+          <p:cNvSpPr/>
+          <p:nvPr/>
+        </p:nvSpPr>
+        <p:spPr>
+          <a:xfrm>
+            <a:off x="914400" y="4183380"/>
+            <a:ext cx="777240" cy="777240"/>
+          </a:xfrm>
+          <a:prstGeom prst="ellipse">
+            <a:avLst/>
+          </a:prstGeom>
+          <a:solidFill>
+            <a:srgbClr val="00A0B0"/>
+          </a:solidFill>
+          <a:ln>
+            <a:noFill/>
+          </a:ln>
+        </p:spPr>
+        <p:style>
+          <a:lnRef idx="1">
+            <a:schemeClr val="accent1"/>
+          </a:lnRef>
+          <a:fillRef idx="3">
+            <a:schemeClr val="accent1"/>
+          </a:fillRef>
+          <a:effectRef idx="2">
+            <a:schemeClr val="accent1"/>
+          </a:effectRef>
+          <a:fontRef idx="minor">
+            <a:schemeClr val="lt1"/>
+          </a:fontRef>
+        </p:style>
+        <p:txBody>
+          <a:bodyPr rtlCol="0" anchor="ctr"/>
+          <a:lstStyle/>
+          <a:p>
+            <a:pPr algn="ctr"/>
+          </a:p>
+        </p:txBody>
+      </p:sp>
+      <p:sp>
+        <p:nvSpPr>
+          <p:cNvPr id="17" name="TextBox 16"/>
+          <p:cNvSpPr txBox="1"/>
+          <p:nvPr/>
+        </p:nvSpPr>
+        <p:spPr>
+          <a:xfrm>
+            <a:off x="914400" y="4183380"/>
+            <a:ext cx="777240" cy="777240"/>
+          </a:xfrm>
+          <a:prstGeom prst="rect">
+            <a:avLst/>
+          </a:prstGeom>
+          <a:noFill/>
+        </p:spPr>
+        <p:txBody>
+          <a:bodyPr wrap="square" lIns="45720" rIns="45720" tIns="18288" bIns="18288" anchor="ctr">
+            <a:spAutoFit/>
+          </a:bodyPr>
+          <a:lstStyle/>
+          <a:p>
+            <a:pPr algn="ctr"/>
+            <a:r>
+              <a:rPr sz="2800" b="1" i="0">
+                <a:solidFill>
+                  <a:srgbClr val="FFFFFF"/>
+                </a:solidFill>
+                <a:latin typeface="Calibri"/>
+              </a:rPr>
+              <a:t>4</a:t>
+            </a:r>
+          </a:p>
+        </p:txBody>
+      </p:sp>
+      <p:sp>
+        <p:nvSpPr>
+          <p:cNvPr id="18" name="Rounded Rectangle 17"/>
+          <p:cNvSpPr/>
+          <p:nvPr/>
+        </p:nvSpPr>
+        <p:spPr>
+          <a:xfrm>
+            <a:off x="2011680" y="4183380"/>
+            <a:ext cx="9144000" cy="777240"/>
+          </a:xfrm>
+          <a:prstGeom prst="roundRect">
+            <a:avLst>
+              <a:gd name="adj" fmla="val 8000"/>
+            </a:avLst>
+          </a:prstGeom>
+          <a:solidFill>
+            <a:srgbClr val="FBFBFD"/>
+          </a:solidFill>
+          <a:ln w="19050">
+            <a:solidFill>
+              <a:srgbClr val="00A0B0"/>
+            </a:solidFill>
+          </a:ln>
+        </p:spPr>
+        <p:style>
+          <a:lnRef idx="1">
+            <a:schemeClr val="accent1"/>
+          </a:lnRef>
+          <a:fillRef idx="3">
+            <a:schemeClr val="accent1"/>
+          </a:fillRef>
+          <a:effectRef idx="2">
+            <a:schemeClr val="accent1"/>
+          </a:effectRef>
+          <a:fontRef idx="minor">
+            <a:schemeClr val="lt1"/>
+          </a:fontRef>
+        </p:style>
+        <p:txBody>
+          <a:bodyPr rtlCol="0" anchor="ctr"/>
+          <a:lstStyle/>
+          <a:p>
+            <a:pPr algn="ctr"/>
+          </a:p>
+        </p:txBody>
+      </p:sp>
+      <p:sp>
+        <p:nvSpPr>
+          <p:cNvPr id="19" name="TextBox 18"/>
+          <p:cNvSpPr txBox="1"/>
+          <p:nvPr/>
+        </p:nvSpPr>
+        <p:spPr>
+          <a:xfrm>
+            <a:off x="2286000" y="4183380"/>
+            <a:ext cx="8686800" cy="777240"/>
+          </a:xfrm>
+          <a:prstGeom prst="rect">
+            <a:avLst/>
+          </a:prstGeom>
+          <a:noFill/>
+        </p:spPr>
+        <p:txBody>
+          <a:bodyPr wrap="square" lIns="45720" rIns="45720" tIns="18288" bIns="18288" anchor="ctr">
+            <a:spAutoFit/>
+          </a:bodyPr>
+          <a:lstStyle/>
+          <a:p>
+            <a:pPr algn="l"/>
+            <a:r>
+              <a:rPr sz="1800" b="0" i="0">
+                <a:solidFill>
+                  <a:srgbClr val="1A1A2E"/>
+                </a:solidFill>
+                <a:latin typeface="Calibri"/>
+              </a:rPr>
+              <a:t>STRIDE = checklist sistematica, 6 categorie</a:t>
+            </a:r>
+          </a:p>
+        </p:txBody>
+      </p:sp>
+      <p:sp>
+        <p:nvSpPr>
+          <p:cNvPr id="20" name="Oval 19"/>
+          <p:cNvSpPr/>
+          <p:nvPr/>
+        </p:nvSpPr>
+        <p:spPr>
+          <a:xfrm>
+            <a:off x="914400" y="5097780"/>
+            <a:ext cx="777240" cy="777240"/>
+          </a:xfrm>
+          <a:prstGeom prst="ellipse">
+            <a:avLst/>
+          </a:prstGeom>
+          <a:solidFill>
+            <a:srgbClr val="00A0B0"/>
+          </a:solidFill>
+          <a:ln>
+            <a:noFill/>
+          </a:ln>
+        </p:spPr>
+        <p:style>
+          <a:lnRef idx="1">
+            <a:schemeClr val="accent1"/>
+          </a:lnRef>
+          <a:fillRef idx="3">
+            <a:schemeClr val="accent1"/>
+          </a:fillRef>
+          <a:effectRef idx="2">
+            <a:schemeClr val="accent1"/>
+          </a:effectRef>
+          <a:fontRef idx="minor">
+            <a:schemeClr val="lt1"/>
+          </a:fontRef>
+        </p:style>
+        <p:txBody>
+          <a:bodyPr rtlCol="0" anchor="ctr"/>
+          <a:lstStyle/>
+          <a:p>
+            <a:pPr algn="ctr"/>
+          </a:p>
+        </p:txBody>
+      </p:sp>
+      <p:sp>
+        <p:nvSpPr>
+          <p:cNvPr id="21" name="TextBox 20"/>
+          <p:cNvSpPr txBox="1"/>
+          <p:nvPr/>
+        </p:nvSpPr>
+        <p:spPr>
+          <a:xfrm>
+            <a:off x="914400" y="5097780"/>
+            <a:ext cx="777240" cy="777240"/>
+          </a:xfrm>
+          <a:prstGeom prst="rect">
+            <a:avLst/>
+          </a:prstGeom>
+          <a:noFill/>
+        </p:spPr>
+        <p:txBody>
+          <a:bodyPr wrap="square" lIns="45720" rIns="45720" tIns="18288" bIns="18288" anchor="ctr">
+            <a:spAutoFit/>
+          </a:bodyPr>
+          <a:lstStyle/>
+          <a:p>
+            <a:pPr algn="ctr"/>
+            <a:r>
+              <a:rPr sz="2800" b="1" i="0">
+                <a:solidFill>
+                  <a:srgbClr val="FFFFFF"/>
+                </a:solidFill>
+                <a:latin typeface="Calibri"/>
+              </a:rPr>
+              <a:t>5</a:t>
+            </a:r>
+          </a:p>
+        </p:txBody>
+      </p:sp>
+      <p:sp>
+        <p:nvSpPr>
+          <p:cNvPr id="22" name="Rounded Rectangle 21"/>
+          <p:cNvSpPr/>
+          <p:nvPr/>
+        </p:nvSpPr>
+        <p:spPr>
+          <a:xfrm>
+            <a:off x="2011680" y="5097780"/>
+            <a:ext cx="9144000" cy="777240"/>
+          </a:xfrm>
+          <a:prstGeom prst="roundRect">
+            <a:avLst>
+              <a:gd name="adj" fmla="val 8000"/>
+            </a:avLst>
+          </a:prstGeom>
+          <a:solidFill>
+            <a:srgbClr val="FBFBFD"/>
+          </a:solidFill>
+          <a:ln w="19050">
+            <a:solidFill>
+              <a:srgbClr val="00A0B0"/>
+            </a:solidFill>
+          </a:ln>
+        </p:spPr>
+        <p:style>
+          <a:lnRef idx="1">
+            <a:schemeClr val="accent1"/>
+          </a:lnRef>
+          <a:fillRef idx="3">
+            <a:schemeClr val="accent1"/>
+          </a:fillRef>
+          <a:effectRef idx="2">
+            <a:schemeClr val="accent1"/>
+          </a:effectRef>
+          <a:fontRef idx="minor">
+            <a:schemeClr val="lt1"/>
+          </a:fontRef>
+        </p:style>
+        <p:txBody>
+          <a:bodyPr rtlCol="0" anchor="ctr"/>
+          <a:lstStyle/>
+          <a:p>
+            <a:pPr algn="ctr"/>
+          </a:p>
+        </p:txBody>
+      </p:sp>
+      <p:sp>
+        <p:nvSpPr>
+          <p:cNvPr id="23" name="TextBox 22"/>
+          <p:cNvSpPr txBox="1"/>
+          <p:nvPr/>
+        </p:nvSpPr>
+        <p:spPr>
+          <a:xfrm>
+            <a:off x="2286000" y="5097780"/>
+            <a:ext cx="8686800" cy="777240"/>
+          </a:xfrm>
+          <a:prstGeom prst="rect">
+            <a:avLst/>
+          </a:prstGeom>
+          <a:noFill/>
+        </p:spPr>
+        <p:txBody>
+          <a:bodyPr wrap="square" lIns="45720" rIns="45720" tIns="18288" bIns="18288" anchor="ctr">
+            <a:spAutoFit/>
+          </a:bodyPr>
+          <a:lstStyle/>
+          <a:p>
+            <a:pPr algn="l"/>
+            <a:r>
+              <a:rPr sz="1800" b="0" i="0">
+                <a:solidFill>
+                  <a:srgbClr val="1A1A2E"/>
+                </a:solidFill>
+                <a:latin typeface="Calibri"/>
+              </a:rPr>
+              <a:t>Trust boundary = ogni attraversamento è opportunità d'attacco</a:t>
             </a:r>
           </a:p>
         </p:txBody>
       </p:sp>
       <p:cxnSp>
         <p:nvCxnSpPr>
-          <p:cNvPr id="9" name="Connector 8"/>
+          <p:cNvPr id="24" name="Connector 23"/>
           <p:cNvCxnSpPr/>
           <p:nvPr/>
         </p:nvCxnSpPr>
@@ -6277,7 +6146,7 @@
       </p:cxnSp>
       <p:sp>
         <p:nvSpPr>
-          <p:cNvPr id="10" name="TextBox 9"/>
+          <p:cNvPr id="25" name="TextBox 24"/>
           <p:cNvSpPr txBox="1"/>
           <p:nvPr/>
         </p:nvSpPr>
@@ -6312,7 +6181,7 @@
       </p:sp>
       <p:sp>
         <p:nvSpPr>
-          <p:cNvPr id="11" name="TextBox 10"/>
+          <p:cNvPr id="26" name="TextBox 25"/>
           <p:cNvSpPr txBox="1"/>
           <p:nvPr/>
         </p:nvSpPr>
@@ -6340,7 +6209,7 @@
                 </a:solidFill>
                 <a:latin typeface="Calibri"/>
               </a:rPr>
-              <a:t>L2  ·  13/14</a:t>
+              <a:t>L2  ·  13/15</a:t>
             </a:r>
           </a:p>
         </p:txBody>
@@ -6372,7 +6241,7 @@
         <p:spPr>
           <a:xfrm>
             <a:off x="0" y="0"/>
-            <a:ext cx="12191695" cy="6858000"/>
+            <a:ext cx="4114800" cy="6858000"/>
           </a:xfrm>
           <a:prstGeom prst="rect">
             <a:avLst/>
@@ -6408,6 +6277,398 @@
       </p:sp>
       <p:sp>
         <p:nvSpPr>
+          <p:cNvPr id="3" name="Rectangle 2"/>
+          <p:cNvSpPr/>
+          <p:nvPr/>
+        </p:nvSpPr>
+        <p:spPr>
+          <a:xfrm>
+            <a:off x="4114800" y="0"/>
+            <a:ext cx="8046720" cy="6858000"/>
+          </a:xfrm>
+          <a:prstGeom prst="rect">
+            <a:avLst/>
+          </a:prstGeom>
+          <a:solidFill>
+            <a:srgbClr val="F1F4F8"/>
+          </a:solidFill>
+          <a:ln>
+            <a:noFill/>
+          </a:ln>
+        </p:spPr>
+        <p:style>
+          <a:lnRef idx="1">
+            <a:schemeClr val="accent1"/>
+          </a:lnRef>
+          <a:fillRef idx="3">
+            <a:schemeClr val="accent1"/>
+          </a:fillRef>
+          <a:effectRef idx="2">
+            <a:schemeClr val="accent1"/>
+          </a:effectRef>
+          <a:fontRef idx="minor">
+            <a:schemeClr val="lt1"/>
+          </a:fontRef>
+        </p:style>
+        <p:txBody>
+          <a:bodyPr rtlCol="0" anchor="ctr"/>
+          <a:lstStyle/>
+          <a:p>
+            <a:pPr algn="ctr"/>
+          </a:p>
+        </p:txBody>
+      </p:sp>
+      <p:sp>
+        <p:nvSpPr>
+          <p:cNvPr id="4" name="Rectangle 3"/>
+          <p:cNvSpPr/>
+          <p:nvPr/>
+        </p:nvSpPr>
+        <p:spPr>
+          <a:xfrm>
+            <a:off x="4114800" y="0"/>
+            <a:ext cx="137160" cy="6858000"/>
+          </a:xfrm>
+          <a:prstGeom prst="rect">
+            <a:avLst/>
+          </a:prstGeom>
+          <a:solidFill>
+            <a:srgbClr val="00A0B0"/>
+          </a:solidFill>
+          <a:ln>
+            <a:noFill/>
+          </a:ln>
+        </p:spPr>
+        <p:style>
+          <a:lnRef idx="1">
+            <a:schemeClr val="accent1"/>
+          </a:lnRef>
+          <a:fillRef idx="3">
+            <a:schemeClr val="accent1"/>
+          </a:fillRef>
+          <a:effectRef idx="2">
+            <a:schemeClr val="accent1"/>
+          </a:effectRef>
+          <a:fontRef idx="minor">
+            <a:schemeClr val="lt1"/>
+          </a:fontRef>
+        </p:style>
+        <p:txBody>
+          <a:bodyPr rtlCol="0" anchor="ctr"/>
+          <a:lstStyle/>
+          <a:p>
+            <a:pPr algn="ctr"/>
+          </a:p>
+        </p:txBody>
+      </p:sp>
+      <p:sp>
+        <p:nvSpPr>
+          <p:cNvPr id="5" name="TextBox 4"/>
+          <p:cNvSpPr txBox="1"/>
+          <p:nvPr/>
+        </p:nvSpPr>
+        <p:spPr>
+          <a:xfrm>
+            <a:off x="274320" y="2103120"/>
+            <a:ext cx="3657600" cy="2286000"/>
+          </a:xfrm>
+          <a:prstGeom prst="rect">
+            <a:avLst/>
+          </a:prstGeom>
+          <a:noFill/>
+        </p:spPr>
+        <p:txBody>
+          <a:bodyPr wrap="square" lIns="45720" rIns="45720" tIns="18288" bIns="18288" anchor="t">
+            <a:spAutoFit/>
+          </a:bodyPr>
+          <a:lstStyle/>
+          <a:p>
+            <a:pPr algn="ctr"/>
+            <a:r>
+              <a:rPr sz="17000" b="1" i="0">
+                <a:solidFill>
+                  <a:srgbClr val="00A0B0"/>
+                </a:solidFill>
+                <a:latin typeface="Calibri"/>
+              </a:rPr>
+              <a:t>03</a:t>
+            </a:r>
+          </a:p>
+        </p:txBody>
+      </p:sp>
+      <p:sp>
+        <p:nvSpPr>
+          <p:cNvPr id="6" name="TextBox 5"/>
+          <p:cNvSpPr txBox="1"/>
+          <p:nvPr/>
+        </p:nvSpPr>
+        <p:spPr>
+          <a:xfrm>
+            <a:off x="274320" y="4572000"/>
+            <a:ext cx="3657600" cy="457200"/>
+          </a:xfrm>
+          <a:prstGeom prst="rect">
+            <a:avLst/>
+          </a:prstGeom>
+          <a:noFill/>
+        </p:spPr>
+        <p:txBody>
+          <a:bodyPr wrap="square" lIns="45720" rIns="45720" tIns="18288" bIns="18288" anchor="t">
+            <a:spAutoFit/>
+          </a:bodyPr>
+          <a:lstStyle/>
+          <a:p>
+            <a:pPr algn="ctr"/>
+            <a:r>
+              <a:rPr sz="2000" b="1" i="0">
+                <a:solidFill>
+                  <a:srgbClr val="6FD8E0"/>
+                </a:solidFill>
+                <a:latin typeface="Calibri"/>
+              </a:rPr>
+              <a:t>PARTE</a:t>
+            </a:r>
+          </a:p>
+        </p:txBody>
+      </p:sp>
+      <p:sp>
+        <p:nvSpPr>
+          <p:cNvPr id="7" name="TextBox 6"/>
+          <p:cNvSpPr txBox="1"/>
+          <p:nvPr/>
+        </p:nvSpPr>
+        <p:spPr>
+          <a:xfrm>
+            <a:off x="4572000" y="2286000"/>
+            <a:ext cx="7315200" cy="1645920"/>
+          </a:xfrm>
+          <a:prstGeom prst="rect">
+            <a:avLst/>
+          </a:prstGeom>
+          <a:noFill/>
+        </p:spPr>
+        <p:txBody>
+          <a:bodyPr wrap="square" lIns="45720" rIns="45720" tIns="18288" bIns="18288" anchor="t">
+            <a:spAutoFit/>
+          </a:bodyPr>
+          <a:lstStyle/>
+          <a:p>
+            <a:pPr algn="l"/>
+            <a:r>
+              <a:rPr sz="4400" b="1" i="0">
+                <a:solidFill>
+                  <a:srgbClr val="0F2D52"/>
+                </a:solidFill>
+                <a:latin typeface="Calibri"/>
+              </a:rPr>
+              <a:t>Per approfondire</a:t>
+            </a:r>
+          </a:p>
+        </p:txBody>
+      </p:sp>
+      <p:sp>
+        <p:nvSpPr>
+          <p:cNvPr id="8" name="TextBox 7"/>
+          <p:cNvSpPr txBox="1"/>
+          <p:nvPr/>
+        </p:nvSpPr>
+        <p:spPr>
+          <a:xfrm>
+            <a:off x="4572000" y="3931920"/>
+            <a:ext cx="7315200" cy="1828800"/>
+          </a:xfrm>
+          <a:prstGeom prst="rect">
+            <a:avLst/>
+          </a:prstGeom>
+          <a:noFill/>
+        </p:spPr>
+        <p:txBody>
+          <a:bodyPr wrap="square" lIns="45720" rIns="45720" tIns="18288" bIns="18288" anchor="t">
+            <a:spAutoFit/>
+          </a:bodyPr>
+          <a:lstStyle/>
+          <a:p>
+            <a:pPr algn="l"/>
+            <a:r>
+              <a:rPr sz="1800" b="0" i="1">
+                <a:solidFill>
+                  <a:srgbClr val="6B7280"/>
+                </a:solidFill>
+                <a:latin typeface="Calibri"/>
+              </a:rPr>
+              <a:t>Cosa leggere prima della prossima lezione</a:t>
+            </a:r>
+          </a:p>
+        </p:txBody>
+      </p:sp>
+      <p:cxnSp>
+        <p:nvCxnSpPr>
+          <p:cNvPr id="9" name="Connector 8"/>
+          <p:cNvCxnSpPr/>
+          <p:nvPr/>
+        </p:nvCxnSpPr>
+        <p:spPr>
+          <a:xfrm>
+            <a:off x="457200" y="6446520"/>
+            <a:ext cx="11274552" cy="0"/>
+          </a:xfrm>
+          <a:prstGeom prst="line">
+            <a:avLst/>
+          </a:prstGeom>
+          <a:ln w="19050">
+            <a:solidFill>
+              <a:srgbClr val="00A0B0"/>
+            </a:solidFill>
+          </a:ln>
+        </p:spPr>
+        <p:style>
+          <a:lnRef idx="2">
+            <a:schemeClr val="accent1"/>
+          </a:lnRef>
+          <a:fillRef idx="0">
+            <a:schemeClr val="accent1"/>
+          </a:fillRef>
+          <a:effectRef idx="1">
+            <a:schemeClr val="accent1"/>
+          </a:effectRef>
+          <a:fontRef idx="minor">
+            <a:schemeClr val="tx1"/>
+          </a:fontRef>
+        </p:style>
+      </p:cxnSp>
+      <p:sp>
+        <p:nvSpPr>
+          <p:cNvPr id="10" name="TextBox 9"/>
+          <p:cNvSpPr txBox="1"/>
+          <p:nvPr/>
+        </p:nvSpPr>
+        <p:spPr>
+          <a:xfrm>
+            <a:off x="457200" y="6473952"/>
+            <a:ext cx="7315200" cy="292608"/>
+          </a:xfrm>
+          <a:prstGeom prst="rect">
+            <a:avLst/>
+          </a:prstGeom>
+          <a:noFill/>
+        </p:spPr>
+        <p:txBody>
+          <a:bodyPr wrap="square" lIns="45720" rIns="45720" tIns="18288" bIns="18288" anchor="t">
+            <a:spAutoFit/>
+          </a:bodyPr>
+          <a:lstStyle/>
+          <a:p>
+            <a:pPr algn="l"/>
+            <a:r>
+              <a:rPr sz="1000" b="0" i="0">
+                <a:solidFill>
+                  <a:srgbClr val="6B7280"/>
+                </a:solidFill>
+                <a:latin typeface="Calibri"/>
+              </a:rPr>
+              <a:t>Secure Coding · Corso IFTS STEM · A. Manneschi · 2024/2025</a:t>
+            </a:r>
+          </a:p>
+        </p:txBody>
+      </p:sp>
+      <p:sp>
+        <p:nvSpPr>
+          <p:cNvPr id="11" name="TextBox 10"/>
+          <p:cNvSpPr txBox="1"/>
+          <p:nvPr/>
+        </p:nvSpPr>
+        <p:spPr>
+          <a:xfrm>
+            <a:off x="10515600" y="6473952"/>
+            <a:ext cx="1188720" cy="292608"/>
+          </a:xfrm>
+          <a:prstGeom prst="rect">
+            <a:avLst/>
+          </a:prstGeom>
+          <a:noFill/>
+        </p:spPr>
+        <p:txBody>
+          <a:bodyPr wrap="square" lIns="45720" rIns="45720" tIns="18288" bIns="18288" anchor="t">
+            <a:spAutoFit/>
+          </a:bodyPr>
+          <a:lstStyle/>
+          <a:p>
+            <a:pPr algn="r"/>
+            <a:r>
+              <a:rPr sz="1000" b="1" i="0">
+                <a:solidFill>
+                  <a:srgbClr val="6B7280"/>
+                </a:solidFill>
+                <a:latin typeface="Calibri"/>
+              </a:rPr>
+              <a:t>L2  ·  14/15</a:t>
+            </a:r>
+          </a:p>
+        </p:txBody>
+      </p:sp>
+    </p:spTree>
+  </p:cSld>
+  <p:clrMapOvr>
+    <a:masterClrMapping/>
+  </p:clrMapOvr>
+</p:sld>
+</file>
+
+<file path=ppt/slides/slide15.xml><?xml version="1.0" encoding="utf-8"?>
+<p:sld xmlns:a="http://schemas.openxmlformats.org/drawingml/2006/main" xmlns:p="http://schemas.openxmlformats.org/presentationml/2006/main" xmlns:r="http://schemas.openxmlformats.org/officeDocument/2006/relationships">
+  <p:cSld>
+    <p:spTree>
+      <p:nvGrpSpPr>
+        <p:cNvPr id="1" name=""/>
+        <p:cNvGrpSpPr/>
+        <p:nvPr/>
+      </p:nvGrpSpPr>
+      <p:grpSpPr/>
+      <p:sp>
+        <p:nvSpPr>
+          <p:cNvPr id="2" name="Rectangle 1"/>
+          <p:cNvSpPr/>
+          <p:nvPr/>
+        </p:nvSpPr>
+        <p:spPr>
+          <a:xfrm>
+            <a:off x="0" y="0"/>
+            <a:ext cx="12191695" cy="6858000"/>
+          </a:xfrm>
+          <a:prstGeom prst="rect">
+            <a:avLst/>
+          </a:prstGeom>
+          <a:solidFill>
+            <a:srgbClr val="081B33"/>
+          </a:solidFill>
+          <a:ln>
+            <a:noFill/>
+          </a:ln>
+        </p:spPr>
+        <p:style>
+          <a:lnRef idx="1">
+            <a:schemeClr val="accent1"/>
+          </a:lnRef>
+          <a:fillRef idx="3">
+            <a:schemeClr val="accent1"/>
+          </a:fillRef>
+          <a:effectRef idx="2">
+            <a:schemeClr val="accent1"/>
+          </a:effectRef>
+          <a:fontRef idx="minor">
+            <a:schemeClr val="lt1"/>
+          </a:fontRef>
+        </p:style>
+        <p:txBody>
+          <a:bodyPr rtlCol="0" anchor="ctr"/>
+          <a:lstStyle/>
+          <a:p>
+            <a:pPr algn="ctr"/>
+          </a:p>
+        </p:txBody>
+      </p:sp>
+      <p:sp>
+        <p:nvSpPr>
           <p:cNvPr id="3" name="Oval 2"/>
           <p:cNvSpPr/>
           <p:nvPr/>
@@ -6820,7 +7081,7 @@
                 </a:solidFill>
                 <a:latin typeface="Calibri"/>
               </a:rPr>
-              <a:t>L2  ·  14/14</a:t>
+              <a:t>L2  ·  15/15</a:t>
             </a:r>
           </a:p>
         </p:txBody>
@@ -7656,7 +7917,7 @@
                 </a:solidFill>
                 <a:latin typeface="Calibri"/>
               </a:rPr>
-              <a:t>L2  ·  2/14</a:t>
+              <a:t>L2  ·  2/15</a:t>
             </a:r>
           </a:p>
         </p:txBody>
@@ -8005,7 +8266,7 @@
                 </a:solidFill>
                 <a:latin typeface="Calibri"/>
               </a:rPr>
-              <a:t>L2  ·  3/14</a:t>
+              <a:t>L2  ·  3/15</a:t>
             </a:r>
           </a:p>
         </p:txBody>
@@ -8019,6 +8280,517 @@
 </file>
 
 <file path=ppt/slides/slide4.xml><?xml version="1.0" encoding="utf-8"?>
+<p:sld xmlns:a="http://schemas.openxmlformats.org/drawingml/2006/main" xmlns:p="http://schemas.openxmlformats.org/presentationml/2006/main" xmlns:r="http://schemas.openxmlformats.org/officeDocument/2006/relationships">
+  <p:cSld>
+    <p:spTree>
+      <p:nvGrpSpPr>
+        <p:cNvPr id="1" name=""/>
+        <p:cNvGrpSpPr/>
+        <p:nvPr/>
+      </p:nvGrpSpPr>
+      <p:grpSpPr/>
+      <p:sp>
+        <p:nvSpPr>
+          <p:cNvPr id="2" name="Rectangle 1"/>
+          <p:cNvSpPr/>
+          <p:nvPr/>
+        </p:nvSpPr>
+        <p:spPr>
+          <a:xfrm>
+            <a:off x="0" y="0"/>
+            <a:ext cx="12191695" cy="777240"/>
+          </a:xfrm>
+          <a:prstGeom prst="rect">
+            <a:avLst/>
+          </a:prstGeom>
+          <a:solidFill>
+            <a:srgbClr val="0F2D52"/>
+          </a:solidFill>
+          <a:ln>
+            <a:noFill/>
+          </a:ln>
+        </p:spPr>
+        <p:style>
+          <a:lnRef idx="1">
+            <a:schemeClr val="accent1"/>
+          </a:lnRef>
+          <a:fillRef idx="3">
+            <a:schemeClr val="accent1"/>
+          </a:fillRef>
+          <a:effectRef idx="2">
+            <a:schemeClr val="accent1"/>
+          </a:effectRef>
+          <a:fontRef idx="minor">
+            <a:schemeClr val="lt1"/>
+          </a:fontRef>
+        </p:style>
+        <p:txBody>
+          <a:bodyPr rtlCol="0" anchor="ctr"/>
+          <a:lstStyle/>
+          <a:p>
+            <a:pPr algn="ctr"/>
+          </a:p>
+        </p:txBody>
+      </p:sp>
+      <p:sp>
+        <p:nvSpPr>
+          <p:cNvPr id="3" name="TextBox 2"/>
+          <p:cNvSpPr txBox="1"/>
+          <p:nvPr/>
+        </p:nvSpPr>
+        <p:spPr>
+          <a:xfrm>
+            <a:off x="457200" y="164592"/>
+            <a:ext cx="10972800" cy="502920"/>
+          </a:xfrm>
+          <a:prstGeom prst="rect">
+            <a:avLst/>
+          </a:prstGeom>
+          <a:noFill/>
+        </p:spPr>
+        <p:txBody>
+          <a:bodyPr wrap="square" lIns="45720" rIns="45720" tIns="18288" bIns="18288" anchor="ctr">
+            <a:spAutoFit/>
+          </a:bodyPr>
+          <a:lstStyle/>
+          <a:p>
+            <a:pPr algn="l"/>
+            <a:r>
+              <a:rPr sz="2400" b="1" i="0">
+                <a:solidFill>
+                  <a:srgbClr val="FFFFFF"/>
+                </a:solidFill>
+                <a:latin typeface="Calibri"/>
+              </a:rPr>
+              <a:t>🌐  OWASP — chi sono e cosa producono</a:t>
+            </a:r>
+          </a:p>
+        </p:txBody>
+      </p:sp>
+      <p:sp>
+        <p:nvSpPr>
+          <p:cNvPr id="4" name="TextBox 3"/>
+          <p:cNvSpPr txBox="1"/>
+          <p:nvPr/>
+        </p:nvSpPr>
+        <p:spPr>
+          <a:xfrm>
+            <a:off x="457200" y="914400"/>
+            <a:ext cx="11247120" cy="457200"/>
+          </a:xfrm>
+          <a:prstGeom prst="rect">
+            <a:avLst/>
+          </a:prstGeom>
+          <a:noFill/>
+        </p:spPr>
+        <p:txBody>
+          <a:bodyPr wrap="square" lIns="45720" rIns="45720" tIns="18288" bIns="18288" anchor="t">
+            <a:spAutoFit/>
+          </a:bodyPr>
+          <a:lstStyle/>
+          <a:p>
+            <a:pPr algn="l"/>
+            <a:r>
+              <a:rPr sz="1500" b="0" i="1">
+                <a:solidFill>
+                  <a:srgbClr val="00A0B0"/>
+                </a:solidFill>
+                <a:latin typeface="Calibri"/>
+              </a:rPr>
+              <a:t>Quando un collega dice 'A03', sta citando OWASP Top 10</a:t>
+            </a:r>
+          </a:p>
+        </p:txBody>
+      </p:sp>
+      <p:sp>
+        <p:nvSpPr>
+          <p:cNvPr id="5" name="TextBox 4"/>
+          <p:cNvSpPr txBox="1"/>
+          <p:nvPr/>
+        </p:nvSpPr>
+        <p:spPr>
+          <a:xfrm>
+            <a:off x="640080" y="1554480"/>
+            <a:ext cx="10972800" cy="5029200"/>
+          </a:xfrm>
+          <a:prstGeom prst="rect">
+            <a:avLst/>
+          </a:prstGeom>
+          <a:noFill/>
+        </p:spPr>
+        <p:txBody>
+          <a:bodyPr wrap="square">
+            <a:spAutoFit/>
+          </a:bodyPr>
+          <a:lstStyle/>
+          <a:p>
+            <a:pPr>
+              <a:lnSpc>
+                <a:spcPct val="150000"/>
+              </a:lnSpc>
+              <a:spcAft>
+                <a:spcPts val="400"/>
+              </a:spcAft>
+            </a:pPr>
+            <a:r>
+              <a:rPr sz="2000" b="1">
+                <a:solidFill>
+                  <a:srgbClr val="00A0B0"/>
+                </a:solidFill>
+                <a:latin typeface="Calibri"/>
+              </a:rPr>
+              <a:t>▸  </a:t>
+            </a:r>
+            <a:r>
+              <a:rPr sz="2000">
+                <a:solidFill>
+                  <a:srgbClr val="1A1A2E"/>
+                </a:solidFill>
+                <a:latin typeface="Calibri"/>
+              </a:rPr>
+              <a:t>Open Web Application Security Project</a:t>
+            </a:r>
+          </a:p>
+          <a:p>
+            <a:pPr>
+              <a:lnSpc>
+                <a:spcPct val="150000"/>
+              </a:lnSpc>
+              <a:spcAft>
+                <a:spcPts val="400"/>
+              </a:spcAft>
+            </a:pPr>
+            <a:r>
+              <a:rPr sz="2000" b="1">
+                <a:solidFill>
+                  <a:srgbClr val="00A0B0"/>
+                </a:solidFill>
+                <a:latin typeface="Calibri"/>
+              </a:rPr>
+              <a:t>▸  </a:t>
+            </a:r>
+            <a:r>
+              <a:rPr sz="2000">
+                <a:solidFill>
+                  <a:srgbClr val="1A1A2E"/>
+                </a:solidFill>
+                <a:latin typeface="Calibri"/>
+              </a:rPr>
+              <a:t>Fondazione no-profit, internazionale, dal 2001</a:t>
+            </a:r>
+          </a:p>
+          <a:p>
+            <a:pPr>
+              <a:lnSpc>
+                <a:spcPct val="150000"/>
+              </a:lnSpc>
+              <a:spcAft>
+                <a:spcPts val="400"/>
+              </a:spcAft>
+            </a:pPr>
+            <a:r>
+              <a:rPr sz="2000" b="1">
+                <a:solidFill>
+                  <a:srgbClr val="00A0B0"/>
+                </a:solidFill>
+                <a:latin typeface="Calibri"/>
+              </a:rPr>
+              <a:t>▸  </a:t>
+            </a:r>
+            <a:r>
+              <a:rPr sz="2000">
+                <a:solidFill>
+                  <a:srgbClr val="1A1A2E"/>
+                </a:solidFill>
+                <a:latin typeface="Calibri"/>
+              </a:rPr>
+              <a:t>Tutto gratuito · niente vendita di prodotti</a:t>
+            </a:r>
+          </a:p>
+          <a:p>
+            <a:pPr>
+              <a:lnSpc>
+                <a:spcPct val="150000"/>
+              </a:lnSpc>
+              <a:spcAft>
+                <a:spcPts val="400"/>
+              </a:spcAft>
+            </a:pPr>
+            <a:r>
+              <a:rPr sz="2000" b="1">
+                <a:solidFill>
+                  <a:srgbClr val="00A0B0"/>
+                </a:solidFill>
+                <a:latin typeface="Calibri"/>
+              </a:rPr>
+              <a:t>▸  </a:t>
+            </a:r>
+            <a:r>
+              <a:rPr sz="2000">
+                <a:solidFill>
+                  <a:srgbClr val="1A1A2E"/>
+                </a:solidFill>
+                <a:latin typeface="Calibri"/>
+              </a:rPr>
+              <a:t>Standard de facto della sicurezza applicativa nel mondo</a:t>
+            </a:r>
+          </a:p>
+          <a:p>
+            <a:pPr>
+              <a:lnSpc>
+                <a:spcPct val="150000"/>
+              </a:lnSpc>
+              <a:spcAft>
+                <a:spcPts val="400"/>
+              </a:spcAft>
+            </a:pPr>
+            <a:r>
+              <a:rPr sz="2000" b="1">
+                <a:solidFill>
+                  <a:srgbClr val="00A0B0"/>
+                </a:solidFill>
+                <a:latin typeface="Calibri"/>
+              </a:rPr>
+              <a:t>▸  </a:t>
+            </a:r>
+            <a:r>
+              <a:rPr sz="2000">
+                <a:solidFill>
+                  <a:srgbClr val="1A1A2E"/>
+                </a:solidFill>
+                <a:latin typeface="Calibri"/>
+              </a:rPr>
+              <a:t/>
+            </a:r>
+          </a:p>
+          <a:p>
+            <a:pPr>
+              <a:lnSpc>
+                <a:spcPct val="150000"/>
+              </a:lnSpc>
+              <a:spcAft>
+                <a:spcPts val="400"/>
+              </a:spcAft>
+            </a:pPr>
+            <a:r>
+              <a:rPr sz="2000" b="1">
+                <a:solidFill>
+                  <a:srgbClr val="00A0B0"/>
+                </a:solidFill>
+                <a:latin typeface="Calibri"/>
+              </a:rPr>
+              <a:t>▸  </a:t>
+            </a:r>
+            <a:r>
+              <a:rPr sz="2000">
+                <a:solidFill>
+                  <a:srgbClr val="1A1A2E"/>
+                </a:solidFill>
+                <a:latin typeface="Calibri"/>
+              </a:rPr>
+              <a:t>Cosa pubblica (tutto open):</a:t>
+            </a:r>
+          </a:p>
+          <a:p>
+            <a:pPr>
+              <a:lnSpc>
+                <a:spcPct val="150000"/>
+              </a:lnSpc>
+              <a:spcAft>
+                <a:spcPts val="400"/>
+              </a:spcAft>
+            </a:pPr>
+            <a:r>
+              <a:rPr sz="2000" b="1">
+                <a:solidFill>
+                  <a:srgbClr val="00A0B0"/>
+                </a:solidFill>
+                <a:latin typeface="Calibri"/>
+              </a:rPr>
+              <a:t>▸  </a:t>
+            </a:r>
+            <a:r>
+              <a:rPr sz="2000">
+                <a:solidFill>
+                  <a:srgbClr val="1A1A2E"/>
+                </a:solidFill>
+                <a:latin typeface="Calibri"/>
+              </a:rPr>
+              <a:t>  OWASP Top 10  ·  API Security Top 10  ·  LLM Top 10</a:t>
+            </a:r>
+          </a:p>
+          <a:p>
+            <a:pPr>
+              <a:lnSpc>
+                <a:spcPct val="150000"/>
+              </a:lnSpc>
+              <a:spcAft>
+                <a:spcPts val="400"/>
+              </a:spcAft>
+            </a:pPr>
+            <a:r>
+              <a:rPr sz="2000" b="1">
+                <a:solidFill>
+                  <a:srgbClr val="00A0B0"/>
+                </a:solidFill>
+                <a:latin typeface="Calibri"/>
+              </a:rPr>
+              <a:t>▸  </a:t>
+            </a:r>
+            <a:r>
+              <a:rPr sz="2000">
+                <a:solidFill>
+                  <a:srgbClr val="1A1A2E"/>
+                </a:solidFill>
+                <a:latin typeface="Calibri"/>
+              </a:rPr>
+              <a:t>  Cheat Sheet Series  ·  ASVS  ·  SAMM</a:t>
+            </a:r>
+          </a:p>
+          <a:p>
+            <a:pPr>
+              <a:lnSpc>
+                <a:spcPct val="150000"/>
+              </a:lnSpc>
+              <a:spcAft>
+                <a:spcPts val="400"/>
+              </a:spcAft>
+            </a:pPr>
+            <a:r>
+              <a:rPr sz="2000" b="1">
+                <a:solidFill>
+                  <a:srgbClr val="00A0B0"/>
+                </a:solidFill>
+                <a:latin typeface="Calibri"/>
+              </a:rPr>
+              <a:t>▸  </a:t>
+            </a:r>
+            <a:r>
+              <a:rPr sz="2000">
+                <a:solidFill>
+                  <a:srgbClr val="1A1A2E"/>
+                </a:solidFill>
+                <a:latin typeface="Calibri"/>
+              </a:rPr>
+              <a:t>  Tool: ZAP, Dependency-Check, Threat Dragon</a:t>
+            </a:r>
+          </a:p>
+        </p:txBody>
+      </p:sp>
+      <p:cxnSp>
+        <p:nvCxnSpPr>
+          <p:cNvPr id="6" name="Connector 5"/>
+          <p:cNvCxnSpPr/>
+          <p:nvPr/>
+        </p:nvCxnSpPr>
+        <p:spPr>
+          <a:xfrm>
+            <a:off x="457200" y="6446520"/>
+            <a:ext cx="11274552" cy="0"/>
+          </a:xfrm>
+          <a:prstGeom prst="line">
+            <a:avLst/>
+          </a:prstGeom>
+          <a:ln w="19050">
+            <a:solidFill>
+              <a:srgbClr val="00A0B0"/>
+            </a:solidFill>
+          </a:ln>
+        </p:spPr>
+        <p:style>
+          <a:lnRef idx="2">
+            <a:schemeClr val="accent1"/>
+          </a:lnRef>
+          <a:fillRef idx="0">
+            <a:schemeClr val="accent1"/>
+          </a:fillRef>
+          <a:effectRef idx="1">
+            <a:schemeClr val="accent1"/>
+          </a:effectRef>
+          <a:fontRef idx="minor">
+            <a:schemeClr val="tx1"/>
+          </a:fontRef>
+        </p:style>
+      </p:cxnSp>
+      <p:sp>
+        <p:nvSpPr>
+          <p:cNvPr id="7" name="TextBox 6"/>
+          <p:cNvSpPr txBox="1"/>
+          <p:nvPr/>
+        </p:nvSpPr>
+        <p:spPr>
+          <a:xfrm>
+            <a:off x="457200" y="6473952"/>
+            <a:ext cx="7315200" cy="292608"/>
+          </a:xfrm>
+          <a:prstGeom prst="rect">
+            <a:avLst/>
+          </a:prstGeom>
+          <a:noFill/>
+        </p:spPr>
+        <p:txBody>
+          <a:bodyPr wrap="square" lIns="45720" rIns="45720" tIns="18288" bIns="18288" anchor="t">
+            <a:spAutoFit/>
+          </a:bodyPr>
+          <a:lstStyle/>
+          <a:p>
+            <a:pPr algn="l"/>
+            <a:r>
+              <a:rPr sz="1000" b="0" i="0">
+                <a:solidFill>
+                  <a:srgbClr val="6B7280"/>
+                </a:solidFill>
+                <a:latin typeface="Calibri"/>
+              </a:rPr>
+              <a:t>Secure Coding · Corso IFTS STEM · A. Manneschi · 2024/2025</a:t>
+            </a:r>
+          </a:p>
+        </p:txBody>
+      </p:sp>
+      <p:sp>
+        <p:nvSpPr>
+          <p:cNvPr id="8" name="TextBox 7"/>
+          <p:cNvSpPr txBox="1"/>
+          <p:nvPr/>
+        </p:nvSpPr>
+        <p:spPr>
+          <a:xfrm>
+            <a:off x="10515600" y="6473952"/>
+            <a:ext cx="1188720" cy="292608"/>
+          </a:xfrm>
+          <a:prstGeom prst="rect">
+            <a:avLst/>
+          </a:prstGeom>
+          <a:noFill/>
+        </p:spPr>
+        <p:txBody>
+          <a:bodyPr wrap="square" lIns="45720" rIns="45720" tIns="18288" bIns="18288" anchor="t">
+            <a:spAutoFit/>
+          </a:bodyPr>
+          <a:lstStyle/>
+          <a:p>
+            <a:pPr algn="r"/>
+            <a:r>
+              <a:rPr sz="1000" b="1" i="0">
+                <a:solidFill>
+                  <a:srgbClr val="6B7280"/>
+                </a:solidFill>
+                <a:latin typeface="Calibri"/>
+              </a:rPr>
+              <a:t>L2  ·  4/15</a:t>
+            </a:r>
+          </a:p>
+        </p:txBody>
+      </p:sp>
+    </p:spTree>
+  </p:cSld>
+  <p:clrMapOvr>
+    <a:masterClrMapping/>
+  </p:clrMapOvr>
+</p:sld>
+</file>
+
+<file path=ppt/slides/slide5.xml><?xml version="1.0" encoding="utf-8"?>
 <p:sld xmlns:a="http://schemas.openxmlformats.org/drawingml/2006/main" xmlns:p="http://schemas.openxmlformats.org/presentationml/2006/main" xmlns:r="http://schemas.openxmlformats.org/officeDocument/2006/relationships">
   <p:cSld>
     <p:spTree>
@@ -8984,7 +9756,7 @@
                 </a:solidFill>
                 <a:latin typeface="Calibri"/>
               </a:rPr>
-              <a:t>L2  ·  4/14</a:t>
+              <a:t>L2  ·  5/15</a:t>
             </a:r>
           </a:p>
         </p:txBody>
@@ -8997,7 +9769,7 @@
 </p:sld>
 </file>
 
-<file path=ppt/slides/slide5.xml><?xml version="1.0" encoding="utf-8"?>
+<file path=ppt/slides/slide6.xml><?xml version="1.0" encoding="utf-8"?>
 <p:sld xmlns:a="http://schemas.openxmlformats.org/drawingml/2006/main" xmlns:p="http://schemas.openxmlformats.org/presentationml/2006/main" xmlns:r="http://schemas.openxmlformats.org/officeDocument/2006/relationships">
   <p:cSld>
     <p:spTree>
@@ -9623,399 +10395,7 @@
                 </a:solidFill>
                 <a:latin typeface="Calibri"/>
               </a:rPr>
-              <a:t>L2  ·  5/14</a:t>
-            </a:r>
-          </a:p>
-        </p:txBody>
-      </p:sp>
-    </p:spTree>
-  </p:cSld>
-  <p:clrMapOvr>
-    <a:masterClrMapping/>
-  </p:clrMapOvr>
-</p:sld>
-</file>
-
-<file path=ppt/slides/slide6.xml><?xml version="1.0" encoding="utf-8"?>
-<p:sld xmlns:a="http://schemas.openxmlformats.org/drawingml/2006/main" xmlns:p="http://schemas.openxmlformats.org/presentationml/2006/main" xmlns:r="http://schemas.openxmlformats.org/officeDocument/2006/relationships">
-  <p:cSld>
-    <p:spTree>
-      <p:nvGrpSpPr>
-        <p:cNvPr id="1" name=""/>
-        <p:cNvGrpSpPr/>
-        <p:nvPr/>
-      </p:nvGrpSpPr>
-      <p:grpSpPr/>
-      <p:sp>
-        <p:nvSpPr>
-          <p:cNvPr id="2" name="Rectangle 1"/>
-          <p:cNvSpPr/>
-          <p:nvPr/>
-        </p:nvSpPr>
-        <p:spPr>
-          <a:xfrm>
-            <a:off x="0" y="0"/>
-            <a:ext cx="4114800" cy="6858000"/>
-          </a:xfrm>
-          <a:prstGeom prst="rect">
-            <a:avLst/>
-          </a:prstGeom>
-          <a:solidFill>
-            <a:srgbClr val="081B33"/>
-          </a:solidFill>
-          <a:ln>
-            <a:noFill/>
-          </a:ln>
-        </p:spPr>
-        <p:style>
-          <a:lnRef idx="1">
-            <a:schemeClr val="accent1"/>
-          </a:lnRef>
-          <a:fillRef idx="3">
-            <a:schemeClr val="accent1"/>
-          </a:fillRef>
-          <a:effectRef idx="2">
-            <a:schemeClr val="accent1"/>
-          </a:effectRef>
-          <a:fontRef idx="minor">
-            <a:schemeClr val="lt1"/>
-          </a:fontRef>
-        </p:style>
-        <p:txBody>
-          <a:bodyPr rtlCol="0" anchor="ctr"/>
-          <a:lstStyle/>
-          <a:p>
-            <a:pPr algn="ctr"/>
-          </a:p>
-        </p:txBody>
-      </p:sp>
-      <p:sp>
-        <p:nvSpPr>
-          <p:cNvPr id="3" name="Rectangle 2"/>
-          <p:cNvSpPr/>
-          <p:nvPr/>
-        </p:nvSpPr>
-        <p:spPr>
-          <a:xfrm>
-            <a:off x="4114800" y="0"/>
-            <a:ext cx="8046720" cy="6858000"/>
-          </a:xfrm>
-          <a:prstGeom prst="rect">
-            <a:avLst/>
-          </a:prstGeom>
-          <a:solidFill>
-            <a:srgbClr val="F1F4F8"/>
-          </a:solidFill>
-          <a:ln>
-            <a:noFill/>
-          </a:ln>
-        </p:spPr>
-        <p:style>
-          <a:lnRef idx="1">
-            <a:schemeClr val="accent1"/>
-          </a:lnRef>
-          <a:fillRef idx="3">
-            <a:schemeClr val="accent1"/>
-          </a:fillRef>
-          <a:effectRef idx="2">
-            <a:schemeClr val="accent1"/>
-          </a:effectRef>
-          <a:fontRef idx="minor">
-            <a:schemeClr val="lt1"/>
-          </a:fontRef>
-        </p:style>
-        <p:txBody>
-          <a:bodyPr rtlCol="0" anchor="ctr"/>
-          <a:lstStyle/>
-          <a:p>
-            <a:pPr algn="ctr"/>
-          </a:p>
-        </p:txBody>
-      </p:sp>
-      <p:sp>
-        <p:nvSpPr>
-          <p:cNvPr id="4" name="Rectangle 3"/>
-          <p:cNvSpPr/>
-          <p:nvPr/>
-        </p:nvSpPr>
-        <p:spPr>
-          <a:xfrm>
-            <a:off x="4114800" y="0"/>
-            <a:ext cx="137160" cy="6858000"/>
-          </a:xfrm>
-          <a:prstGeom prst="rect">
-            <a:avLst/>
-          </a:prstGeom>
-          <a:solidFill>
-            <a:srgbClr val="00A0B0"/>
-          </a:solidFill>
-          <a:ln>
-            <a:noFill/>
-          </a:ln>
-        </p:spPr>
-        <p:style>
-          <a:lnRef idx="1">
-            <a:schemeClr val="accent1"/>
-          </a:lnRef>
-          <a:fillRef idx="3">
-            <a:schemeClr val="accent1"/>
-          </a:fillRef>
-          <a:effectRef idx="2">
-            <a:schemeClr val="accent1"/>
-          </a:effectRef>
-          <a:fontRef idx="minor">
-            <a:schemeClr val="lt1"/>
-          </a:fontRef>
-        </p:style>
-        <p:txBody>
-          <a:bodyPr rtlCol="0" anchor="ctr"/>
-          <a:lstStyle/>
-          <a:p>
-            <a:pPr algn="ctr"/>
-          </a:p>
-        </p:txBody>
-      </p:sp>
-      <p:sp>
-        <p:nvSpPr>
-          <p:cNvPr id="5" name="TextBox 4"/>
-          <p:cNvSpPr txBox="1"/>
-          <p:nvPr/>
-        </p:nvSpPr>
-        <p:spPr>
-          <a:xfrm>
-            <a:off x="274320" y="2103120"/>
-            <a:ext cx="3657600" cy="2286000"/>
-          </a:xfrm>
-          <a:prstGeom prst="rect">
-            <a:avLst/>
-          </a:prstGeom>
-          <a:noFill/>
-        </p:spPr>
-        <p:txBody>
-          <a:bodyPr wrap="square" lIns="45720" rIns="45720" tIns="18288" bIns="18288" anchor="t">
-            <a:spAutoFit/>
-          </a:bodyPr>
-          <a:lstStyle/>
-          <a:p>
-            <a:pPr algn="ctr"/>
-            <a:r>
-              <a:rPr sz="17000" b="1" i="0">
-                <a:solidFill>
-                  <a:srgbClr val="00A0B0"/>
-                </a:solidFill>
-                <a:latin typeface="Calibri"/>
-              </a:rPr>
-              <a:t>02</a:t>
-            </a:r>
-          </a:p>
-        </p:txBody>
-      </p:sp>
-      <p:sp>
-        <p:nvSpPr>
-          <p:cNvPr id="6" name="TextBox 5"/>
-          <p:cNvSpPr txBox="1"/>
-          <p:nvPr/>
-        </p:nvSpPr>
-        <p:spPr>
-          <a:xfrm>
-            <a:off x="274320" y="4572000"/>
-            <a:ext cx="3657600" cy="457200"/>
-          </a:xfrm>
-          <a:prstGeom prst="rect">
-            <a:avLst/>
-          </a:prstGeom>
-          <a:noFill/>
-        </p:spPr>
-        <p:txBody>
-          <a:bodyPr wrap="square" lIns="45720" rIns="45720" tIns="18288" bIns="18288" anchor="t">
-            <a:spAutoFit/>
-          </a:bodyPr>
-          <a:lstStyle/>
-          <a:p>
-            <a:pPr algn="ctr"/>
-            <a:r>
-              <a:rPr sz="2000" b="1" i="0">
-                <a:solidFill>
-                  <a:srgbClr val="6FD8E0"/>
-                </a:solidFill>
-                <a:latin typeface="Calibri"/>
-              </a:rPr>
-              <a:t>PARTE</a:t>
-            </a:r>
-          </a:p>
-        </p:txBody>
-      </p:sp>
-      <p:sp>
-        <p:nvSpPr>
-          <p:cNvPr id="7" name="TextBox 6"/>
-          <p:cNvSpPr txBox="1"/>
-          <p:nvPr/>
-        </p:nvSpPr>
-        <p:spPr>
-          <a:xfrm>
-            <a:off x="4572000" y="2286000"/>
-            <a:ext cx="7315200" cy="1645920"/>
-          </a:xfrm>
-          <a:prstGeom prst="rect">
-            <a:avLst/>
-          </a:prstGeom>
-          <a:noFill/>
-        </p:spPr>
-        <p:txBody>
-          <a:bodyPr wrap="square" lIns="45720" rIns="45720" tIns="18288" bIns="18288" anchor="t">
-            <a:spAutoFit/>
-          </a:bodyPr>
-          <a:lstStyle/>
-          <a:p>
-            <a:pPr algn="l"/>
-            <a:r>
-              <a:rPr sz="4400" b="1" i="0">
-                <a:solidFill>
-                  <a:srgbClr val="0F2D52"/>
-                </a:solidFill>
-                <a:latin typeface="Calibri"/>
-              </a:rPr>
-              <a:t>Threat Modeling</a:t>
-            </a:r>
-          </a:p>
-        </p:txBody>
-      </p:sp>
-      <p:sp>
-        <p:nvSpPr>
-          <p:cNvPr id="8" name="TextBox 7"/>
-          <p:cNvSpPr txBox="1"/>
-          <p:nvPr/>
-        </p:nvSpPr>
-        <p:spPr>
-          <a:xfrm>
-            <a:off x="4572000" y="3931920"/>
-            <a:ext cx="7315200" cy="1828800"/>
-          </a:xfrm>
-          <a:prstGeom prst="rect">
-            <a:avLst/>
-          </a:prstGeom>
-          <a:noFill/>
-        </p:spPr>
-        <p:txBody>
-          <a:bodyPr wrap="square" lIns="45720" rIns="45720" tIns="18288" bIns="18288" anchor="t">
-            <a:spAutoFit/>
-          </a:bodyPr>
-          <a:lstStyle/>
-          <a:p>
-            <a:pPr algn="l"/>
-            <a:r>
-              <a:rPr sz="1800" b="0" i="1">
-                <a:solidFill>
-                  <a:srgbClr val="6B7280"/>
-                </a:solidFill>
-                <a:latin typeface="Calibri"/>
-              </a:rPr>
-              <a:t>30 minuti di carta + lavagna salvano ore di refactor</a:t>
-            </a:r>
-          </a:p>
-        </p:txBody>
-      </p:sp>
-      <p:cxnSp>
-        <p:nvCxnSpPr>
-          <p:cNvPr id="9" name="Connector 8"/>
-          <p:cNvCxnSpPr/>
-          <p:nvPr/>
-        </p:nvCxnSpPr>
-        <p:spPr>
-          <a:xfrm>
-            <a:off x="457200" y="6446520"/>
-            <a:ext cx="11274552" cy="0"/>
-          </a:xfrm>
-          <a:prstGeom prst="line">
-            <a:avLst/>
-          </a:prstGeom>
-          <a:ln w="19050">
-            <a:solidFill>
-              <a:srgbClr val="00A0B0"/>
-            </a:solidFill>
-          </a:ln>
-        </p:spPr>
-        <p:style>
-          <a:lnRef idx="2">
-            <a:schemeClr val="accent1"/>
-          </a:lnRef>
-          <a:fillRef idx="0">
-            <a:schemeClr val="accent1"/>
-          </a:fillRef>
-          <a:effectRef idx="1">
-            <a:schemeClr val="accent1"/>
-          </a:effectRef>
-          <a:fontRef idx="minor">
-            <a:schemeClr val="tx1"/>
-          </a:fontRef>
-        </p:style>
-      </p:cxnSp>
-      <p:sp>
-        <p:nvSpPr>
-          <p:cNvPr id="10" name="TextBox 9"/>
-          <p:cNvSpPr txBox="1"/>
-          <p:nvPr/>
-        </p:nvSpPr>
-        <p:spPr>
-          <a:xfrm>
-            <a:off x="457200" y="6473952"/>
-            <a:ext cx="7315200" cy="292608"/>
-          </a:xfrm>
-          <a:prstGeom prst="rect">
-            <a:avLst/>
-          </a:prstGeom>
-          <a:noFill/>
-        </p:spPr>
-        <p:txBody>
-          <a:bodyPr wrap="square" lIns="45720" rIns="45720" tIns="18288" bIns="18288" anchor="t">
-            <a:spAutoFit/>
-          </a:bodyPr>
-          <a:lstStyle/>
-          <a:p>
-            <a:pPr algn="l"/>
-            <a:r>
-              <a:rPr sz="1000" b="0" i="0">
-                <a:solidFill>
-                  <a:srgbClr val="6B7280"/>
-                </a:solidFill>
-                <a:latin typeface="Calibri"/>
-              </a:rPr>
-              <a:t>Secure Coding · Corso IFTS STEM · A. Manneschi · 2024/2025</a:t>
-            </a:r>
-          </a:p>
-        </p:txBody>
-      </p:sp>
-      <p:sp>
-        <p:nvSpPr>
-          <p:cNvPr id="11" name="TextBox 10"/>
-          <p:cNvSpPr txBox="1"/>
-          <p:nvPr/>
-        </p:nvSpPr>
-        <p:spPr>
-          <a:xfrm>
-            <a:off x="10515600" y="6473952"/>
-            <a:ext cx="1188720" cy="292608"/>
-          </a:xfrm>
-          <a:prstGeom prst="rect">
-            <a:avLst/>
-          </a:prstGeom>
-          <a:noFill/>
-        </p:spPr>
-        <p:txBody>
-          <a:bodyPr wrap="square" lIns="45720" rIns="45720" tIns="18288" bIns="18288" anchor="t">
-            <a:spAutoFit/>
-          </a:bodyPr>
-          <a:lstStyle/>
-          <a:p>
-            <a:pPr algn="r"/>
-            <a:r>
-              <a:rPr sz="1000" b="1" i="0">
-                <a:solidFill>
-                  <a:srgbClr val="6B7280"/>
-                </a:solidFill>
-                <a:latin typeface="Calibri"/>
-              </a:rPr>
-              <a:t>L2  ·  6/14</a:t>
+              <a:t>L2  ·  6/15</a:t>
             </a:r>
           </a:p>
         </p:txBody>
@@ -10047,13 +10427,13 @@
         <p:spPr>
           <a:xfrm>
             <a:off x="0" y="0"/>
-            <a:ext cx="12191695" cy="777240"/>
+            <a:ext cx="4114800" cy="6858000"/>
           </a:xfrm>
           <a:prstGeom prst="rect">
             <a:avLst/>
           </a:prstGeom>
           <a:solidFill>
-            <a:srgbClr val="0F2D52"/>
+            <a:srgbClr val="081B33"/>
           </a:solidFill>
           <a:ln>
             <a:noFill/>
@@ -10083,14 +10463,100 @@
       </p:sp>
       <p:sp>
         <p:nvSpPr>
-          <p:cNvPr id="3" name="TextBox 2"/>
+          <p:cNvPr id="3" name="Rectangle 2"/>
+          <p:cNvSpPr/>
+          <p:nvPr/>
+        </p:nvSpPr>
+        <p:spPr>
+          <a:xfrm>
+            <a:off x="4114800" y="0"/>
+            <a:ext cx="8046720" cy="6858000"/>
+          </a:xfrm>
+          <a:prstGeom prst="rect">
+            <a:avLst/>
+          </a:prstGeom>
+          <a:solidFill>
+            <a:srgbClr val="F1F4F8"/>
+          </a:solidFill>
+          <a:ln>
+            <a:noFill/>
+          </a:ln>
+        </p:spPr>
+        <p:style>
+          <a:lnRef idx="1">
+            <a:schemeClr val="accent1"/>
+          </a:lnRef>
+          <a:fillRef idx="3">
+            <a:schemeClr val="accent1"/>
+          </a:fillRef>
+          <a:effectRef idx="2">
+            <a:schemeClr val="accent1"/>
+          </a:effectRef>
+          <a:fontRef idx="minor">
+            <a:schemeClr val="lt1"/>
+          </a:fontRef>
+        </p:style>
+        <p:txBody>
+          <a:bodyPr rtlCol="0" anchor="ctr"/>
+          <a:lstStyle/>
+          <a:p>
+            <a:pPr algn="ctr"/>
+          </a:p>
+        </p:txBody>
+      </p:sp>
+      <p:sp>
+        <p:nvSpPr>
+          <p:cNvPr id="4" name="Rectangle 3"/>
+          <p:cNvSpPr/>
+          <p:nvPr/>
+        </p:nvSpPr>
+        <p:spPr>
+          <a:xfrm>
+            <a:off x="4114800" y="0"/>
+            <a:ext cx="137160" cy="6858000"/>
+          </a:xfrm>
+          <a:prstGeom prst="rect">
+            <a:avLst/>
+          </a:prstGeom>
+          <a:solidFill>
+            <a:srgbClr val="00A0B0"/>
+          </a:solidFill>
+          <a:ln>
+            <a:noFill/>
+          </a:ln>
+        </p:spPr>
+        <p:style>
+          <a:lnRef idx="1">
+            <a:schemeClr val="accent1"/>
+          </a:lnRef>
+          <a:fillRef idx="3">
+            <a:schemeClr val="accent1"/>
+          </a:fillRef>
+          <a:effectRef idx="2">
+            <a:schemeClr val="accent1"/>
+          </a:effectRef>
+          <a:fontRef idx="minor">
+            <a:schemeClr val="lt1"/>
+          </a:fontRef>
+        </p:style>
+        <p:txBody>
+          <a:bodyPr rtlCol="0" anchor="ctr"/>
+          <a:lstStyle/>
+          <a:p>
+            <a:pPr algn="ctr"/>
+          </a:p>
+        </p:txBody>
+      </p:sp>
+      <p:sp>
+        <p:nvSpPr>
+          <p:cNvPr id="5" name="TextBox 4"/>
           <p:cNvSpPr txBox="1"/>
           <p:nvPr/>
         </p:nvSpPr>
         <p:spPr>
           <a:xfrm>
-            <a:off x="457200" y="164592"/>
-            <a:ext cx="10972800" cy="502920"/>
+            <a:off x="274320" y="2103120"/>
+            <a:ext cx="3657600" cy="2286000"/>
           </a:xfrm>
           <a:prstGeom prst="rect">
             <a:avLst/>
@@ -10098,34 +10564,34 @@
           <a:noFill/>
         </p:spPr>
         <p:txBody>
-          <a:bodyPr wrap="square" lIns="45720" rIns="45720" tIns="18288" bIns="18288" anchor="ctr">
+          <a:bodyPr wrap="square" lIns="45720" rIns="45720" tIns="18288" bIns="18288" anchor="t">
             <a:spAutoFit/>
           </a:bodyPr>
           <a:lstStyle/>
           <a:p>
-            <a:pPr algn="l"/>
-            <a:r>
-              <a:rPr sz="2400" b="1" i="0">
-                <a:solidFill>
-                  <a:srgbClr val="FFFFFF"/>
+            <a:pPr algn="ctr"/>
+            <a:r>
+              <a:rPr sz="17000" b="1" i="0">
+                <a:solidFill>
+                  <a:srgbClr val="00A0B0"/>
                 </a:solidFill>
                 <a:latin typeface="Calibri"/>
               </a:rPr>
-              <a:t>❓  Le 4 domande di Adam Shostack</a:t>
-            </a:r>
-          </a:p>
-        </p:txBody>
-      </p:sp>
-      <p:sp>
-        <p:nvSpPr>
-          <p:cNvPr id="4" name="TextBox 3"/>
+              <a:t>02</a:t>
+            </a:r>
+          </a:p>
+        </p:txBody>
+      </p:sp>
+      <p:sp>
+        <p:nvSpPr>
+          <p:cNvPr id="6" name="TextBox 5"/>
           <p:cNvSpPr txBox="1"/>
           <p:nvPr/>
         </p:nvSpPr>
         <p:spPr>
           <a:xfrm>
-            <a:off x="640080" y="1097280"/>
-            <a:ext cx="10972800" cy="5029200"/>
+            <a:off x="274320" y="4572000"/>
+            <a:ext cx="3657600" cy="457200"/>
           </a:xfrm>
           <a:prstGeom prst="rect">
             <a:avLst/>
@@ -10133,183 +10599,97 @@
           <a:noFill/>
         </p:spPr>
         <p:txBody>
-          <a:bodyPr wrap="square">
+          <a:bodyPr wrap="square" lIns="45720" rIns="45720" tIns="18288" bIns="18288" anchor="t">
             <a:spAutoFit/>
           </a:bodyPr>
           <a:lstStyle/>
           <a:p>
-            <a:pPr>
-              <a:lnSpc>
-                <a:spcPct val="150000"/>
-              </a:lnSpc>
-              <a:spcAft>
-                <a:spcPts val="400"/>
-              </a:spcAft>
-            </a:pPr>
-            <a:r>
-              <a:rPr sz="2000" b="1">
-                <a:solidFill>
-                  <a:srgbClr val="00A0B0"/>
+            <a:pPr algn="ctr"/>
+            <a:r>
+              <a:rPr sz="2000" b="1" i="0">
+                <a:solidFill>
+                  <a:srgbClr val="6FD8E0"/>
                 </a:solidFill>
                 <a:latin typeface="Calibri"/>
               </a:rPr>
-              <a:t>▸  </a:t>
-            </a:r>
-            <a:r>
-              <a:rPr sz="2000">
-                <a:solidFill>
-                  <a:srgbClr val="1A1A2E"/>
+              <a:t>PARTE</a:t>
+            </a:r>
+          </a:p>
+        </p:txBody>
+      </p:sp>
+      <p:sp>
+        <p:nvSpPr>
+          <p:cNvPr id="7" name="TextBox 6"/>
+          <p:cNvSpPr txBox="1"/>
+          <p:nvPr/>
+        </p:nvSpPr>
+        <p:spPr>
+          <a:xfrm>
+            <a:off x="4572000" y="2286000"/>
+            <a:ext cx="7315200" cy="1645920"/>
+          </a:xfrm>
+          <a:prstGeom prst="rect">
+            <a:avLst/>
+          </a:prstGeom>
+          <a:noFill/>
+        </p:spPr>
+        <p:txBody>
+          <a:bodyPr wrap="square" lIns="45720" rIns="45720" tIns="18288" bIns="18288" anchor="t">
+            <a:spAutoFit/>
+          </a:bodyPr>
+          <a:lstStyle/>
+          <a:p>
+            <a:pPr algn="l"/>
+            <a:r>
+              <a:rPr sz="4400" b="1" i="0">
+                <a:solidFill>
+                  <a:srgbClr val="0F2D52"/>
                 </a:solidFill>
                 <a:latin typeface="Calibri"/>
               </a:rPr>
-              <a:t>1. Cosa stiamo costruendo? → disegna il sistema (DFD)</a:t>
-            </a:r>
-          </a:p>
-          <a:p>
-            <a:pPr>
-              <a:lnSpc>
-                <a:spcPct val="150000"/>
-              </a:lnSpc>
-              <a:spcAft>
-                <a:spcPts val="400"/>
-              </a:spcAft>
-            </a:pPr>
-            <a:r>
-              <a:rPr sz="2000" b="1">
-                <a:solidFill>
-                  <a:srgbClr val="00A0B0"/>
+              <a:t>Threat Modeling</a:t>
+            </a:r>
+          </a:p>
+        </p:txBody>
+      </p:sp>
+      <p:sp>
+        <p:nvSpPr>
+          <p:cNvPr id="8" name="TextBox 7"/>
+          <p:cNvSpPr txBox="1"/>
+          <p:nvPr/>
+        </p:nvSpPr>
+        <p:spPr>
+          <a:xfrm>
+            <a:off x="4572000" y="3931920"/>
+            <a:ext cx="7315200" cy="1828800"/>
+          </a:xfrm>
+          <a:prstGeom prst="rect">
+            <a:avLst/>
+          </a:prstGeom>
+          <a:noFill/>
+        </p:spPr>
+        <p:txBody>
+          <a:bodyPr wrap="square" lIns="45720" rIns="45720" tIns="18288" bIns="18288" anchor="t">
+            <a:spAutoFit/>
+          </a:bodyPr>
+          <a:lstStyle/>
+          <a:p>
+            <a:pPr algn="l"/>
+            <a:r>
+              <a:rPr sz="1800" b="0" i="1">
+                <a:solidFill>
+                  <a:srgbClr val="6B7280"/>
                 </a:solidFill>
                 <a:latin typeface="Calibri"/>
               </a:rPr>
-              <a:t>▸  </a:t>
-            </a:r>
-            <a:r>
-              <a:rPr sz="2000">
-                <a:solidFill>
-                  <a:srgbClr val="1A1A2E"/>
-                </a:solidFill>
-                <a:latin typeface="Calibri"/>
-              </a:rPr>
-              <a:t>2. Cosa può andare storto? → applica STRIDE</a:t>
-            </a:r>
-          </a:p>
-          <a:p>
-            <a:pPr>
-              <a:lnSpc>
-                <a:spcPct val="150000"/>
-              </a:lnSpc>
-              <a:spcAft>
-                <a:spcPts val="400"/>
-              </a:spcAft>
-            </a:pPr>
-            <a:r>
-              <a:rPr sz="2000" b="1">
-                <a:solidFill>
-                  <a:srgbClr val="00A0B0"/>
-                </a:solidFill>
-                <a:latin typeface="Calibri"/>
-              </a:rPr>
-              <a:t>▸  </a:t>
-            </a:r>
-            <a:r>
-              <a:rPr sz="2000">
-                <a:solidFill>
-                  <a:srgbClr val="1A1A2E"/>
-                </a:solidFill>
-                <a:latin typeface="Calibri"/>
-              </a:rPr>
-              <a:t>3. Cosa facciamo a riguardo? → mitiga / accetta / elimina</a:t>
-            </a:r>
-          </a:p>
-          <a:p>
-            <a:pPr>
-              <a:lnSpc>
-                <a:spcPct val="150000"/>
-              </a:lnSpc>
-              <a:spcAft>
-                <a:spcPts val="400"/>
-              </a:spcAft>
-            </a:pPr>
-            <a:r>
-              <a:rPr sz="2000" b="1">
-                <a:solidFill>
-                  <a:srgbClr val="00A0B0"/>
-                </a:solidFill>
-                <a:latin typeface="Calibri"/>
-              </a:rPr>
-              <a:t>▸  </a:t>
-            </a:r>
-            <a:r>
-              <a:rPr sz="2000">
-                <a:solidFill>
-                  <a:srgbClr val="1A1A2E"/>
-                </a:solidFill>
-                <a:latin typeface="Calibri"/>
-              </a:rPr>
-              <a:t>4. Abbiamo fatto un buon lavoro? → review e iterazione</a:t>
-            </a:r>
-          </a:p>
-          <a:p>
-            <a:pPr>
-              <a:lnSpc>
-                <a:spcPct val="150000"/>
-              </a:lnSpc>
-              <a:spcAft>
-                <a:spcPts val="400"/>
-              </a:spcAft>
-            </a:pPr>
-            <a:r>
-              <a:rPr sz="2000" b="1">
-                <a:solidFill>
-                  <a:srgbClr val="00A0B0"/>
-                </a:solidFill>
-                <a:latin typeface="Calibri"/>
-              </a:rPr>
-              <a:t>▸  </a:t>
-            </a:r>
-            <a:r>
-              <a:rPr sz="2000">
-                <a:solidFill>
-                  <a:srgbClr val="1A1A2E"/>
-                </a:solidFill>
-                <a:latin typeface="Calibri"/>
-              </a:rPr>
-              <a:t/>
-            </a:r>
-          </a:p>
-          <a:p>
-            <a:pPr>
-              <a:lnSpc>
-                <a:spcPct val="150000"/>
-              </a:lnSpc>
-              <a:spcAft>
-                <a:spcPts val="400"/>
-              </a:spcAft>
-            </a:pPr>
-            <a:r>
-              <a:rPr sz="2000" b="1">
-                <a:solidFill>
-                  <a:srgbClr val="00A0B0"/>
-                </a:solidFill>
-                <a:latin typeface="Calibri"/>
-              </a:rPr>
-              <a:t>▸  </a:t>
-            </a:r>
-            <a:r>
-              <a:rPr sz="2000">
-                <a:solidFill>
-                  <a:srgbClr val="1A1A2E"/>
-                </a:solidFill>
-                <a:latin typeface="Calibri"/>
-              </a:rPr>
-              <a:t>Si fa PRIMA di scrivere codice. Su carta, in 30-60 minuti.</a:t>
+              <a:t>30 minuti di carta + lavagna salvano ore di refactor</a:t>
             </a:r>
           </a:p>
         </p:txBody>
       </p:sp>
       <p:cxnSp>
         <p:nvCxnSpPr>
-          <p:cNvPr id="5" name="Connector 4"/>
+          <p:cNvPr id="9" name="Connector 8"/>
           <p:cNvCxnSpPr/>
           <p:nvPr/>
         </p:nvCxnSpPr>
@@ -10344,7 +10724,7 @@
       </p:cxnSp>
       <p:sp>
         <p:nvSpPr>
-          <p:cNvPr id="6" name="TextBox 5"/>
+          <p:cNvPr id="10" name="TextBox 9"/>
           <p:cNvSpPr txBox="1"/>
           <p:nvPr/>
         </p:nvSpPr>
@@ -10379,7 +10759,7 @@
       </p:sp>
       <p:sp>
         <p:nvSpPr>
-          <p:cNvPr id="7" name="TextBox 6"/>
+          <p:cNvPr id="11" name="TextBox 10"/>
           <p:cNvSpPr txBox="1"/>
           <p:nvPr/>
         </p:nvSpPr>
@@ -10407,7 +10787,7 @@
                 </a:solidFill>
                 <a:latin typeface="Calibri"/>
               </a:rPr>
-              <a:t>L2  ·  7/14</a:t>
+              <a:t>L2  ·  7/15</a:t>
             </a:r>
           </a:p>
         </p:txBody>
@@ -10421,6 +10801,398 @@
 </file>
 
 <file path=ppt/slides/slide8.xml><?xml version="1.0" encoding="utf-8"?>
+<p:sld xmlns:a="http://schemas.openxmlformats.org/drawingml/2006/main" xmlns:p="http://schemas.openxmlformats.org/presentationml/2006/main" xmlns:r="http://schemas.openxmlformats.org/officeDocument/2006/relationships">
+  <p:cSld>
+    <p:spTree>
+      <p:nvGrpSpPr>
+        <p:cNvPr id="1" name=""/>
+        <p:cNvGrpSpPr/>
+        <p:nvPr/>
+      </p:nvGrpSpPr>
+      <p:grpSpPr/>
+      <p:sp>
+        <p:nvSpPr>
+          <p:cNvPr id="2" name="Rectangle 1"/>
+          <p:cNvSpPr/>
+          <p:nvPr/>
+        </p:nvSpPr>
+        <p:spPr>
+          <a:xfrm>
+            <a:off x="0" y="0"/>
+            <a:ext cx="12191695" cy="777240"/>
+          </a:xfrm>
+          <a:prstGeom prst="rect">
+            <a:avLst/>
+          </a:prstGeom>
+          <a:solidFill>
+            <a:srgbClr val="0F2D52"/>
+          </a:solidFill>
+          <a:ln>
+            <a:noFill/>
+          </a:ln>
+        </p:spPr>
+        <p:style>
+          <a:lnRef idx="1">
+            <a:schemeClr val="accent1"/>
+          </a:lnRef>
+          <a:fillRef idx="3">
+            <a:schemeClr val="accent1"/>
+          </a:fillRef>
+          <a:effectRef idx="2">
+            <a:schemeClr val="accent1"/>
+          </a:effectRef>
+          <a:fontRef idx="minor">
+            <a:schemeClr val="lt1"/>
+          </a:fontRef>
+        </p:style>
+        <p:txBody>
+          <a:bodyPr rtlCol="0" anchor="ctr"/>
+          <a:lstStyle/>
+          <a:p>
+            <a:pPr algn="ctr"/>
+          </a:p>
+        </p:txBody>
+      </p:sp>
+      <p:sp>
+        <p:nvSpPr>
+          <p:cNvPr id="3" name="TextBox 2"/>
+          <p:cNvSpPr txBox="1"/>
+          <p:nvPr/>
+        </p:nvSpPr>
+        <p:spPr>
+          <a:xfrm>
+            <a:off x="457200" y="164592"/>
+            <a:ext cx="10972800" cy="502920"/>
+          </a:xfrm>
+          <a:prstGeom prst="rect">
+            <a:avLst/>
+          </a:prstGeom>
+          <a:noFill/>
+        </p:spPr>
+        <p:txBody>
+          <a:bodyPr wrap="square" lIns="45720" rIns="45720" tIns="18288" bIns="18288" anchor="ctr">
+            <a:spAutoFit/>
+          </a:bodyPr>
+          <a:lstStyle/>
+          <a:p>
+            <a:pPr algn="l"/>
+            <a:r>
+              <a:rPr sz="2400" b="1" i="0">
+                <a:solidFill>
+                  <a:srgbClr val="FFFFFF"/>
+                </a:solidFill>
+                <a:latin typeface="Calibri"/>
+              </a:rPr>
+              <a:t>❓  Le 4 domande di Adam Shostack</a:t>
+            </a:r>
+          </a:p>
+        </p:txBody>
+      </p:sp>
+      <p:sp>
+        <p:nvSpPr>
+          <p:cNvPr id="4" name="TextBox 3"/>
+          <p:cNvSpPr txBox="1"/>
+          <p:nvPr/>
+        </p:nvSpPr>
+        <p:spPr>
+          <a:xfrm>
+            <a:off x="640080" y="1097280"/>
+            <a:ext cx="10972800" cy="5029200"/>
+          </a:xfrm>
+          <a:prstGeom prst="rect">
+            <a:avLst/>
+          </a:prstGeom>
+          <a:noFill/>
+        </p:spPr>
+        <p:txBody>
+          <a:bodyPr wrap="square">
+            <a:spAutoFit/>
+          </a:bodyPr>
+          <a:lstStyle/>
+          <a:p>
+            <a:pPr>
+              <a:lnSpc>
+                <a:spcPct val="150000"/>
+              </a:lnSpc>
+              <a:spcAft>
+                <a:spcPts val="400"/>
+              </a:spcAft>
+            </a:pPr>
+            <a:r>
+              <a:rPr sz="2000" b="1">
+                <a:solidFill>
+                  <a:srgbClr val="00A0B0"/>
+                </a:solidFill>
+                <a:latin typeface="Calibri"/>
+              </a:rPr>
+              <a:t>▸  </a:t>
+            </a:r>
+            <a:r>
+              <a:rPr sz="2000">
+                <a:solidFill>
+                  <a:srgbClr val="1A1A2E"/>
+                </a:solidFill>
+                <a:latin typeface="Calibri"/>
+              </a:rPr>
+              <a:t>1. Cosa stiamo costruendo? → disegna il sistema (DFD)</a:t>
+            </a:r>
+          </a:p>
+          <a:p>
+            <a:pPr>
+              <a:lnSpc>
+                <a:spcPct val="150000"/>
+              </a:lnSpc>
+              <a:spcAft>
+                <a:spcPts val="400"/>
+              </a:spcAft>
+            </a:pPr>
+            <a:r>
+              <a:rPr sz="2000" b="1">
+                <a:solidFill>
+                  <a:srgbClr val="00A0B0"/>
+                </a:solidFill>
+                <a:latin typeface="Calibri"/>
+              </a:rPr>
+              <a:t>▸  </a:t>
+            </a:r>
+            <a:r>
+              <a:rPr sz="2000">
+                <a:solidFill>
+                  <a:srgbClr val="1A1A2E"/>
+                </a:solidFill>
+                <a:latin typeface="Calibri"/>
+              </a:rPr>
+              <a:t>2. Cosa può andare storto? → applica STRIDE</a:t>
+            </a:r>
+          </a:p>
+          <a:p>
+            <a:pPr>
+              <a:lnSpc>
+                <a:spcPct val="150000"/>
+              </a:lnSpc>
+              <a:spcAft>
+                <a:spcPts val="400"/>
+              </a:spcAft>
+            </a:pPr>
+            <a:r>
+              <a:rPr sz="2000" b="1">
+                <a:solidFill>
+                  <a:srgbClr val="00A0B0"/>
+                </a:solidFill>
+                <a:latin typeface="Calibri"/>
+              </a:rPr>
+              <a:t>▸  </a:t>
+            </a:r>
+            <a:r>
+              <a:rPr sz="2000">
+                <a:solidFill>
+                  <a:srgbClr val="1A1A2E"/>
+                </a:solidFill>
+                <a:latin typeface="Calibri"/>
+              </a:rPr>
+              <a:t>3. Cosa facciamo a riguardo? → mitiga / accetta / elimina</a:t>
+            </a:r>
+          </a:p>
+          <a:p>
+            <a:pPr>
+              <a:lnSpc>
+                <a:spcPct val="150000"/>
+              </a:lnSpc>
+              <a:spcAft>
+                <a:spcPts val="400"/>
+              </a:spcAft>
+            </a:pPr>
+            <a:r>
+              <a:rPr sz="2000" b="1">
+                <a:solidFill>
+                  <a:srgbClr val="00A0B0"/>
+                </a:solidFill>
+                <a:latin typeface="Calibri"/>
+              </a:rPr>
+              <a:t>▸  </a:t>
+            </a:r>
+            <a:r>
+              <a:rPr sz="2000">
+                <a:solidFill>
+                  <a:srgbClr val="1A1A2E"/>
+                </a:solidFill>
+                <a:latin typeface="Calibri"/>
+              </a:rPr>
+              <a:t>4. Abbiamo fatto un buon lavoro? → review e iterazione</a:t>
+            </a:r>
+          </a:p>
+          <a:p>
+            <a:pPr>
+              <a:lnSpc>
+                <a:spcPct val="150000"/>
+              </a:lnSpc>
+              <a:spcAft>
+                <a:spcPts val="400"/>
+              </a:spcAft>
+            </a:pPr>
+            <a:r>
+              <a:rPr sz="2000" b="1">
+                <a:solidFill>
+                  <a:srgbClr val="00A0B0"/>
+                </a:solidFill>
+                <a:latin typeface="Calibri"/>
+              </a:rPr>
+              <a:t>▸  </a:t>
+            </a:r>
+            <a:r>
+              <a:rPr sz="2000">
+                <a:solidFill>
+                  <a:srgbClr val="1A1A2E"/>
+                </a:solidFill>
+                <a:latin typeface="Calibri"/>
+              </a:rPr>
+              <a:t/>
+            </a:r>
+          </a:p>
+          <a:p>
+            <a:pPr>
+              <a:lnSpc>
+                <a:spcPct val="150000"/>
+              </a:lnSpc>
+              <a:spcAft>
+                <a:spcPts val="400"/>
+              </a:spcAft>
+            </a:pPr>
+            <a:r>
+              <a:rPr sz="2000" b="1">
+                <a:solidFill>
+                  <a:srgbClr val="00A0B0"/>
+                </a:solidFill>
+                <a:latin typeface="Calibri"/>
+              </a:rPr>
+              <a:t>▸  </a:t>
+            </a:r>
+            <a:r>
+              <a:rPr sz="2000">
+                <a:solidFill>
+                  <a:srgbClr val="1A1A2E"/>
+                </a:solidFill>
+                <a:latin typeface="Calibri"/>
+              </a:rPr>
+              <a:t>Si fa PRIMA di scrivere codice. Su carta, in 30-60 minuti.</a:t>
+            </a:r>
+          </a:p>
+        </p:txBody>
+      </p:sp>
+      <p:cxnSp>
+        <p:nvCxnSpPr>
+          <p:cNvPr id="5" name="Connector 4"/>
+          <p:cNvCxnSpPr/>
+          <p:nvPr/>
+        </p:nvCxnSpPr>
+        <p:spPr>
+          <a:xfrm>
+            <a:off x="457200" y="6446520"/>
+            <a:ext cx="11274552" cy="0"/>
+          </a:xfrm>
+          <a:prstGeom prst="line">
+            <a:avLst/>
+          </a:prstGeom>
+          <a:ln w="19050">
+            <a:solidFill>
+              <a:srgbClr val="00A0B0"/>
+            </a:solidFill>
+          </a:ln>
+        </p:spPr>
+        <p:style>
+          <a:lnRef idx="2">
+            <a:schemeClr val="accent1"/>
+          </a:lnRef>
+          <a:fillRef idx="0">
+            <a:schemeClr val="accent1"/>
+          </a:fillRef>
+          <a:effectRef idx="1">
+            <a:schemeClr val="accent1"/>
+          </a:effectRef>
+          <a:fontRef idx="minor">
+            <a:schemeClr val="tx1"/>
+          </a:fontRef>
+        </p:style>
+      </p:cxnSp>
+      <p:sp>
+        <p:nvSpPr>
+          <p:cNvPr id="6" name="TextBox 5"/>
+          <p:cNvSpPr txBox="1"/>
+          <p:nvPr/>
+        </p:nvSpPr>
+        <p:spPr>
+          <a:xfrm>
+            <a:off x="457200" y="6473952"/>
+            <a:ext cx="7315200" cy="292608"/>
+          </a:xfrm>
+          <a:prstGeom prst="rect">
+            <a:avLst/>
+          </a:prstGeom>
+          <a:noFill/>
+        </p:spPr>
+        <p:txBody>
+          <a:bodyPr wrap="square" lIns="45720" rIns="45720" tIns="18288" bIns="18288" anchor="t">
+            <a:spAutoFit/>
+          </a:bodyPr>
+          <a:lstStyle/>
+          <a:p>
+            <a:pPr algn="l"/>
+            <a:r>
+              <a:rPr sz="1000" b="0" i="0">
+                <a:solidFill>
+                  <a:srgbClr val="6B7280"/>
+                </a:solidFill>
+                <a:latin typeface="Calibri"/>
+              </a:rPr>
+              <a:t>Secure Coding · Corso IFTS STEM · A. Manneschi · 2024/2025</a:t>
+            </a:r>
+          </a:p>
+        </p:txBody>
+      </p:sp>
+      <p:sp>
+        <p:nvSpPr>
+          <p:cNvPr id="7" name="TextBox 6"/>
+          <p:cNvSpPr txBox="1"/>
+          <p:nvPr/>
+        </p:nvSpPr>
+        <p:spPr>
+          <a:xfrm>
+            <a:off x="10515600" y="6473952"/>
+            <a:ext cx="1188720" cy="292608"/>
+          </a:xfrm>
+          <a:prstGeom prst="rect">
+            <a:avLst/>
+          </a:prstGeom>
+          <a:noFill/>
+        </p:spPr>
+        <p:txBody>
+          <a:bodyPr wrap="square" lIns="45720" rIns="45720" tIns="18288" bIns="18288" anchor="t">
+            <a:spAutoFit/>
+          </a:bodyPr>
+          <a:lstStyle/>
+          <a:p>
+            <a:pPr algn="r"/>
+            <a:r>
+              <a:rPr sz="1000" b="1" i="0">
+                <a:solidFill>
+                  <a:srgbClr val="6B7280"/>
+                </a:solidFill>
+                <a:latin typeface="Calibri"/>
+              </a:rPr>
+              <a:t>L2  ·  8/15</a:t>
+            </a:r>
+          </a:p>
+        </p:txBody>
+      </p:sp>
+    </p:spTree>
+  </p:cSld>
+  <p:clrMapOvr>
+    <a:masterClrMapping/>
+  </p:clrMapOvr>
+</p:sld>
+</file>
+
+<file path=ppt/slides/slide9.xml><?xml version="1.0" encoding="utf-8"?>
 <p:sld xmlns:a="http://schemas.openxmlformats.org/drawingml/2006/main" xmlns:p="http://schemas.openxmlformats.org/presentationml/2006/main" xmlns:r="http://schemas.openxmlformats.org/officeDocument/2006/relationships">
   <p:cSld>
     <p:spTree>
@@ -11114,267 +11886,7 @@
                 </a:solidFill>
                 <a:latin typeface="Calibri"/>
               </a:rPr>
-              <a:t>L2  ·  8/14</a:t>
-            </a:r>
-          </a:p>
-        </p:txBody>
-      </p:sp>
-    </p:spTree>
-  </p:cSld>
-  <p:clrMapOvr>
-    <a:masterClrMapping/>
-  </p:clrMapOvr>
-</p:sld>
-</file>
-
-<file path=ppt/slides/slide9.xml><?xml version="1.0" encoding="utf-8"?>
-<p:sld xmlns:a="http://schemas.openxmlformats.org/drawingml/2006/main" xmlns:p="http://schemas.openxmlformats.org/presentationml/2006/main" xmlns:r="http://schemas.openxmlformats.org/officeDocument/2006/relationships">
-  <p:cSld>
-    <p:spTree>
-      <p:nvGrpSpPr>
-        <p:cNvPr id="1" name=""/>
-        <p:cNvGrpSpPr/>
-        <p:nvPr/>
-      </p:nvGrpSpPr>
-      <p:grpSpPr/>
-      <p:sp>
-        <p:nvSpPr>
-          <p:cNvPr id="2" name="Rectangle 1"/>
-          <p:cNvSpPr/>
-          <p:nvPr/>
-        </p:nvSpPr>
-        <p:spPr>
-          <a:xfrm>
-            <a:off x="0" y="0"/>
-            <a:ext cx="12191695" cy="777240"/>
-          </a:xfrm>
-          <a:prstGeom prst="rect">
-            <a:avLst/>
-          </a:prstGeom>
-          <a:solidFill>
-            <a:srgbClr val="0F2D52"/>
-          </a:solidFill>
-          <a:ln>
-            <a:noFill/>
-          </a:ln>
-        </p:spPr>
-        <p:style>
-          <a:lnRef idx="1">
-            <a:schemeClr val="accent1"/>
-          </a:lnRef>
-          <a:fillRef idx="3">
-            <a:schemeClr val="accent1"/>
-          </a:fillRef>
-          <a:effectRef idx="2">
-            <a:schemeClr val="accent1"/>
-          </a:effectRef>
-          <a:fontRef idx="minor">
-            <a:schemeClr val="lt1"/>
-          </a:fontRef>
-        </p:style>
-        <p:txBody>
-          <a:bodyPr rtlCol="0" anchor="ctr"/>
-          <a:lstStyle/>
-          <a:p>
-            <a:pPr algn="ctr"/>
-          </a:p>
-        </p:txBody>
-      </p:sp>
-      <p:sp>
-        <p:nvSpPr>
-          <p:cNvPr id="3" name="TextBox 2"/>
-          <p:cNvSpPr txBox="1"/>
-          <p:nvPr/>
-        </p:nvSpPr>
-        <p:spPr>
-          <a:xfrm>
-            <a:off x="457200" y="164592"/>
-            <a:ext cx="10972800" cy="502920"/>
-          </a:xfrm>
-          <a:prstGeom prst="rect">
-            <a:avLst/>
-          </a:prstGeom>
-          <a:noFill/>
-        </p:spPr>
-        <p:txBody>
-          <a:bodyPr wrap="square" lIns="45720" rIns="45720" tIns="18288" bIns="18288" anchor="ctr">
-            <a:spAutoFit/>
-          </a:bodyPr>
-          <a:lstStyle/>
-          <a:p>
-            <a:pPr algn="l"/>
-            <a:r>
-              <a:rPr sz="2400" b="1" i="0">
-                <a:solidFill>
-                  <a:srgbClr val="FFFFFF"/>
-                </a:solidFill>
-                <a:latin typeface="Calibri"/>
-              </a:rPr>
-              <a:t>DFD: esempio su mini-blog</a:t>
-            </a:r>
-          </a:p>
-        </p:txBody>
-      </p:sp>
-      <p:pic>
-        <p:nvPicPr>
-          <p:cNvPr id="4" name="Picture 3" descr="cap2_dfd_mini_blog.png"/>
-          <p:cNvPicPr>
-            <a:picLocks noChangeAspect="1"/>
-          </p:cNvPicPr>
-          <p:nvPr/>
-        </p:nvPicPr>
-        <p:blipFill>
-          <a:blip r:embed="rId2"/>
-          <a:stretch>
-            <a:fillRect/>
-          </a:stretch>
-        </p:blipFill>
-        <p:spPr>
-          <a:xfrm>
-            <a:off x="640080" y="1097280"/>
-            <a:ext cx="10881360" cy="4572000"/>
-          </a:xfrm>
-          <a:prstGeom prst="rect">
-            <a:avLst/>
-          </a:prstGeom>
-        </p:spPr>
-      </p:pic>
-      <p:sp>
-        <p:nvSpPr>
-          <p:cNvPr id="5" name="TextBox 4"/>
-          <p:cNvSpPr txBox="1"/>
-          <p:nvPr/>
-        </p:nvSpPr>
-        <p:spPr>
-          <a:xfrm>
-            <a:off x="457200" y="5852160"/>
-            <a:ext cx="11247120" cy="365760"/>
-          </a:xfrm>
-          <a:prstGeom prst="rect">
-            <a:avLst/>
-          </a:prstGeom>
-          <a:noFill/>
-        </p:spPr>
-        <p:txBody>
-          <a:bodyPr wrap="square" lIns="45720" rIns="45720" tIns="18288" bIns="18288" anchor="t">
-            <a:spAutoFit/>
-          </a:bodyPr>
-          <a:lstStyle/>
-          <a:p>
-            <a:pPr algn="ctr"/>
-            <a:r>
-              <a:rPr sz="1300" b="0" i="1">
-                <a:solidFill>
-                  <a:srgbClr val="6B7280"/>
-                </a:solidFill>
-                <a:latin typeface="Calibri"/>
-              </a:rPr>
-              <a:t>Data Flow Diagram con trust boundary tra Internet/server e server/DB</a:t>
-            </a:r>
-          </a:p>
-        </p:txBody>
-      </p:sp>
-      <p:cxnSp>
-        <p:nvCxnSpPr>
-          <p:cNvPr id="6" name="Connector 5"/>
-          <p:cNvCxnSpPr/>
-          <p:nvPr/>
-        </p:nvCxnSpPr>
-        <p:spPr>
-          <a:xfrm>
-            <a:off x="457200" y="6446520"/>
-            <a:ext cx="11274552" cy="0"/>
-          </a:xfrm>
-          <a:prstGeom prst="line">
-            <a:avLst/>
-          </a:prstGeom>
-          <a:ln w="19050">
-            <a:solidFill>
-              <a:srgbClr val="00A0B0"/>
-            </a:solidFill>
-          </a:ln>
-        </p:spPr>
-        <p:style>
-          <a:lnRef idx="2">
-            <a:schemeClr val="accent1"/>
-          </a:lnRef>
-          <a:fillRef idx="0">
-            <a:schemeClr val="accent1"/>
-          </a:fillRef>
-          <a:effectRef idx="1">
-            <a:schemeClr val="accent1"/>
-          </a:effectRef>
-          <a:fontRef idx="minor">
-            <a:schemeClr val="tx1"/>
-          </a:fontRef>
-        </p:style>
-      </p:cxnSp>
-      <p:sp>
-        <p:nvSpPr>
-          <p:cNvPr id="7" name="TextBox 6"/>
-          <p:cNvSpPr txBox="1"/>
-          <p:nvPr/>
-        </p:nvSpPr>
-        <p:spPr>
-          <a:xfrm>
-            <a:off x="457200" y="6473952"/>
-            <a:ext cx="7315200" cy="292608"/>
-          </a:xfrm>
-          <a:prstGeom prst="rect">
-            <a:avLst/>
-          </a:prstGeom>
-          <a:noFill/>
-        </p:spPr>
-        <p:txBody>
-          <a:bodyPr wrap="square" lIns="45720" rIns="45720" tIns="18288" bIns="18288" anchor="t">
-            <a:spAutoFit/>
-          </a:bodyPr>
-          <a:lstStyle/>
-          <a:p>
-            <a:pPr algn="l"/>
-            <a:r>
-              <a:rPr sz="1000" b="0" i="0">
-                <a:solidFill>
-                  <a:srgbClr val="6B7280"/>
-                </a:solidFill>
-                <a:latin typeface="Calibri"/>
-              </a:rPr>
-              <a:t>Secure Coding · Corso IFTS STEM · A. Manneschi · 2024/2025</a:t>
-            </a:r>
-          </a:p>
-        </p:txBody>
-      </p:sp>
-      <p:sp>
-        <p:nvSpPr>
-          <p:cNvPr id="8" name="TextBox 7"/>
-          <p:cNvSpPr txBox="1"/>
-          <p:nvPr/>
-        </p:nvSpPr>
-        <p:spPr>
-          <a:xfrm>
-            <a:off x="10515600" y="6473952"/>
-            <a:ext cx="1188720" cy="292608"/>
-          </a:xfrm>
-          <a:prstGeom prst="rect">
-            <a:avLst/>
-          </a:prstGeom>
-          <a:noFill/>
-        </p:spPr>
-        <p:txBody>
-          <a:bodyPr wrap="square" lIns="45720" rIns="45720" tIns="18288" bIns="18288" anchor="t">
-            <a:spAutoFit/>
-          </a:bodyPr>
-          <a:lstStyle/>
-          <a:p>
-            <a:pPr algn="r"/>
-            <a:r>
-              <a:rPr sz="1000" b="1" i="0">
-                <a:solidFill>
-                  <a:srgbClr val="6B7280"/>
-                </a:solidFill>
-                <a:latin typeface="Calibri"/>
-              </a:rPr>
-              <a:t>L2  ·  9/14</a:t>
+              <a:t>L2  ·  9/15</a:t>
             </a:r>
           </a:p>
         </p:txBody>
